--- a/환경경제학/2026-1/환경경제학_Chapter_02.pptx
+++ b/환경경제학/2026-1/환경경제학_Chapter_02.pptx
@@ -229,7 +229,7 @@
           <a:p>
             <a:fld id="{4A5E00EF-AEA4-43E2-9451-8F9C59A39471}" type="datetimeFigureOut">
               <a:rPr lang="ko-KR" altLang="en-US" smtClean="0"/>
-              <a:t>2026-09-02</a:t>
+              <a:t>2026-09-09</a:t>
             </a:fld>
             <a:endParaRPr lang="ko-KR" altLang="en-US"/>
           </a:p>
@@ -651,7 +651,7 @@
           <a:p>
             <a:fld id="{CD32C56F-BD27-4999-9E6D-D4EACE3DA9F4}" type="datetime1">
               <a:rPr lang="ko-KR" altLang="en-US" smtClean="0"/>
-              <a:t>2026-09-02</a:t>
+              <a:t>2026-09-09</a:t>
             </a:fld>
             <a:endParaRPr lang="ko-KR" altLang="en-US"/>
           </a:p>
@@ -865,7 +865,7 @@
           <a:p>
             <a:fld id="{8EF4A19C-72C8-45CA-8E3F-68A7FA345D6C}" type="datetime1">
               <a:rPr lang="ko-KR" altLang="en-US" smtClean="0"/>
-              <a:t>2026-09-02</a:t>
+              <a:t>2026-09-09</a:t>
             </a:fld>
             <a:endParaRPr lang="ko-KR" altLang="en-US"/>
           </a:p>
@@ -1089,7 +1089,7 @@
           <a:p>
             <a:fld id="{56A175B2-010B-4341-954C-5F8F5C70B124}" type="datetime1">
               <a:rPr lang="ko-KR" altLang="en-US" smtClean="0"/>
-              <a:t>2026-09-02</a:t>
+              <a:t>2026-09-09</a:t>
             </a:fld>
             <a:endParaRPr lang="ko-KR" altLang="en-US"/>
           </a:p>
@@ -1303,7 +1303,7 @@
           <a:p>
             <a:fld id="{16B83F9E-22C9-45CA-9E85-070F1D3EF530}" type="datetime1">
               <a:rPr lang="ko-KR" altLang="en-US" smtClean="0"/>
-              <a:t>2026-09-02</a:t>
+              <a:t>2026-09-09</a:t>
             </a:fld>
             <a:endParaRPr lang="ko-KR" altLang="en-US"/>
           </a:p>
@@ -1594,7 +1594,7 @@
           <a:p>
             <a:fld id="{03278F45-FB3C-4C4D-B89A-7BC3F5F229F6}" type="datetime1">
               <a:rPr lang="ko-KR" altLang="en-US" smtClean="0"/>
-              <a:t>2026-09-02</a:t>
+              <a:t>2026-09-09</a:t>
             </a:fld>
             <a:endParaRPr lang="ko-KR" altLang="en-US"/>
           </a:p>
@@ -1987,7 +1987,7 @@
           <a:p>
             <a:fld id="{38FDAC3C-35A6-415C-9F03-738A6AC328B1}" type="datetime1">
               <a:rPr lang="ko-KR" altLang="en-US" smtClean="0"/>
-              <a:t>2026-09-02</a:t>
+              <a:t>2026-09-09</a:t>
             </a:fld>
             <a:endParaRPr lang="ko-KR" altLang="en-US"/>
           </a:p>
@@ -3581,7 +3581,7 @@
           <a:p>
             <a:fld id="{507A0DF1-AEE6-4B0D-89D2-351E7B3EF65C}" type="datetime1">
               <a:rPr lang="ko-KR" altLang="en-US" smtClean="0"/>
-              <a:t>2026-09-02</a:t>
+              <a:t>2026-09-09</a:t>
             </a:fld>
             <a:endParaRPr lang="ko-KR" altLang="en-US"/>
           </a:p>
@@ -4009,7 +4009,7 @@
           <a:p>
             <a:fld id="{CA93B8C9-630F-4D57-944D-04FD37CECCD3}" type="datetime1">
               <a:rPr lang="ko-KR" altLang="en-US" smtClean="0"/>
-              <a:t>2026-09-02</a:t>
+              <a:t>2026-09-09</a:t>
             </a:fld>
             <a:endParaRPr lang="ko-KR" altLang="en-US"/>
           </a:p>
@@ -4166,7 +4166,7 @@
           <a:p>
             <a:fld id="{E986165A-AC43-4902-9541-874ECD310BA3}" type="datetime1">
               <a:rPr lang="ko-KR" altLang="en-US" smtClean="0"/>
-              <a:t>2026-09-02</a:t>
+              <a:t>2026-09-09</a:t>
             </a:fld>
             <a:endParaRPr lang="ko-KR" altLang="en-US"/>
           </a:p>
@@ -4493,7 +4493,7 @@
           <a:p>
             <a:fld id="{47E6EE6D-2B0E-43A9-87A2-7354CDB998F4}" type="datetime1">
               <a:rPr lang="ko-KR" altLang="en-US" smtClean="0"/>
-              <a:t>2026-09-02</a:t>
+              <a:t>2026-09-09</a:t>
             </a:fld>
             <a:endParaRPr lang="ko-KR" altLang="en-US"/>
           </a:p>
@@ -4797,7 +4797,7 @@
           <a:p>
             <a:fld id="{5CC5944E-0BC8-4FAA-9F94-6B4B05834E10}" type="datetime1">
               <a:rPr lang="ko-KR" altLang="en-US" smtClean="0"/>
-              <a:t>2026-09-02</a:t>
+              <a:t>2026-09-09</a:t>
             </a:fld>
             <a:endParaRPr lang="ko-KR" altLang="en-US"/>
           </a:p>
@@ -12925,7 +12925,7 @@
         <p:spPr>
           <a:xfrm>
             <a:off x="288790" y="958844"/>
-            <a:ext cx="10707658" cy="3738011"/>
+            <a:ext cx="10707658" cy="4846007"/>
           </a:xfrm>
           <a:prstGeom prst="rect">
             <a:avLst/>
@@ -13082,6 +13082,80 @@
             </a:r>
           </a:p>
           <a:p>
+            <a:pPr marL="1292225" lvl="2" indent="-285750">
+              <a:lnSpc>
+                <a:spcPct val="150000"/>
+              </a:lnSpc>
+              <a:buFont typeface="Wingdings" panose="05000000000000000000" pitchFamily="2" charset="2"/>
+              <a:buChar char="Ø"/>
+            </a:pPr>
+            <a:r>
+              <a:rPr lang="ko-KR" altLang="en-US" sz="1600" spc="-50" dirty="0"/>
+              <a:t>우리가 입는 옷은 석유제품 </a:t>
+            </a:r>
+            <a:r>
+              <a:rPr lang="en-US" altLang="ko-KR" sz="1600" spc="-50" dirty="0"/>
+              <a:t>(</a:t>
+            </a:r>
+            <a:r>
+              <a:rPr lang="ko-KR" altLang="en-US" sz="1600" spc="-50" dirty="0" err="1"/>
+              <a:t>폴리에스터</a:t>
+            </a:r>
+            <a:r>
+              <a:rPr lang="en-US" altLang="ko-KR" sz="1600" spc="-50" dirty="0"/>
+              <a:t>, </a:t>
+            </a:r>
+            <a:r>
+              <a:rPr lang="ko-KR" altLang="en-US" sz="1600" spc="-50" dirty="0"/>
+              <a:t>나일론</a:t>
+            </a:r>
+            <a:r>
+              <a:rPr lang="en-US" altLang="ko-KR" sz="1600" spc="-50" dirty="0"/>
+              <a:t> </a:t>
+            </a:r>
+            <a:r>
+              <a:rPr lang="ko-KR" altLang="en-US" sz="1600" spc="-50" dirty="0"/>
+              <a:t>등</a:t>
+            </a:r>
+            <a:r>
+              <a:rPr lang="en-US" altLang="ko-KR" sz="1600" spc="-50" dirty="0"/>
+              <a:t>) </a:t>
+            </a:r>
+            <a:r>
+              <a:rPr lang="ko-KR" altLang="en-US" sz="1600" spc="-50" dirty="0"/>
+              <a:t>혹은 가죽을 원료로 한다</a:t>
+            </a:r>
+            <a:r>
+              <a:rPr lang="en-US" altLang="ko-KR" sz="1600" spc="-50" dirty="0"/>
+              <a:t>.</a:t>
+            </a:r>
+          </a:p>
+          <a:p>
+            <a:pPr marL="1292225" lvl="2" indent="-285750">
+              <a:lnSpc>
+                <a:spcPct val="150000"/>
+              </a:lnSpc>
+              <a:buFont typeface="Wingdings" panose="05000000000000000000" pitchFamily="2" charset="2"/>
+              <a:buChar char="Ø"/>
+            </a:pPr>
+            <a:r>
+              <a:rPr lang="ko-KR" altLang="en-US" sz="1600" spc="-50" dirty="0"/>
+              <a:t>우리는 등산을 해서</a:t>
+            </a:r>
+            <a:r>
+              <a:rPr lang="en-US" altLang="ko-KR" sz="1600" spc="-50" dirty="0"/>
+              <a:t>, </a:t>
+            </a:r>
+            <a:r>
+              <a:rPr lang="ko-KR" altLang="en-US" sz="1600" spc="-50" dirty="0"/>
+              <a:t>자연으로부터 아름다운 경관을 누린다</a:t>
+            </a:r>
+            <a:r>
+              <a:rPr lang="en-US" altLang="ko-KR" sz="1600" spc="-50" dirty="0"/>
+              <a:t>.</a:t>
+            </a:r>
+          </a:p>
+          <a:p>
             <a:pPr marL="835025" lvl="1" indent="-285750">
               <a:lnSpc>
                 <a:spcPct val="150000"/>
@@ -13091,7 +13165,64 @@
             </a:pPr>
             <a:r>
               <a:rPr lang="ko-KR" altLang="en-US" sz="1600" spc="-50" dirty="0"/>
-              <a:t>경제는 생산과정을 통해 자연환경이 제공한 원료와 에너지를 소비가 가능한 완제품으로 바꾼다</a:t>
+              <a:t>인간의 생산과 소비활동은 폐기물을 생성하고</a:t>
+            </a:r>
+            <a:r>
+              <a:rPr lang="en-US" altLang="ko-KR" sz="1600" spc="-50" dirty="0"/>
+              <a:t>, </a:t>
+            </a:r>
+            <a:r>
+              <a:rPr lang="ko-KR" altLang="en-US" sz="1600" spc="-50" dirty="0"/>
+              <a:t>다시 자연으로 돌려보내며</a:t>
+            </a:r>
+            <a:r>
+              <a:rPr lang="en-US" altLang="ko-KR" sz="1600" spc="-50" dirty="0"/>
+              <a:t>, </a:t>
+            </a:r>
+            <a:r>
+              <a:rPr lang="ko-KR" altLang="en-US" sz="1600" spc="-50" dirty="0"/>
+              <a:t>인간이 적절히 처리하지 못하면 환경오염으로 나타난다</a:t>
+            </a:r>
+            <a:r>
+              <a:rPr lang="en-US" altLang="ko-KR" sz="1600" spc="-50" dirty="0"/>
+              <a:t>.</a:t>
+            </a:r>
+          </a:p>
+          <a:p>
+            <a:pPr marL="1349375" lvl="2" indent="-342900">
+              <a:lnSpc>
+                <a:spcPct val="150000"/>
+              </a:lnSpc>
+              <a:buFont typeface="Wingdings" panose="05000000000000000000" pitchFamily="2" charset="2"/>
+              <a:buChar char="Ø"/>
+            </a:pPr>
+            <a:r>
+              <a:rPr lang="ko-KR" altLang="en-US" sz="1600" spc="-50" dirty="0"/>
+              <a:t>우리가 쓰던 재화들이 버려지면 폐기물이 되어</a:t>
+            </a:r>
+            <a:r>
+              <a:rPr lang="en-US" altLang="ko-KR" sz="1600" spc="-50" dirty="0"/>
+              <a:t>, </a:t>
+            </a:r>
+            <a:r>
+              <a:rPr lang="ko-KR" altLang="en-US" sz="1600" spc="-50" dirty="0"/>
+              <a:t>재사용</a:t>
+            </a:r>
+            <a:r>
+              <a:rPr lang="en-US" altLang="ko-KR" sz="1600" spc="-50" dirty="0"/>
+              <a:t> </a:t>
+            </a:r>
+            <a:r>
+              <a:rPr lang="ko-KR" altLang="en-US" sz="1600" spc="-50" dirty="0"/>
+              <a:t>혹은 소각</a:t>
+            </a:r>
+            <a:r>
+              <a:rPr lang="en-US" altLang="ko-KR" sz="1600" spc="-50" dirty="0"/>
+              <a:t>·</a:t>
+            </a:r>
+            <a:r>
+              <a:rPr lang="ko-KR" altLang="en-US" sz="1600" spc="-50" dirty="0"/>
+              <a:t>매립 된다</a:t>
             </a:r>
             <a:r>
               <a:rPr lang="en-US" altLang="ko-KR" sz="1600" spc="-50" dirty="0"/>
@@ -13106,30 +13237,7 @@
               <a:buFont typeface="Wingdings" panose="05000000000000000000" pitchFamily="2" charset="2"/>
               <a:buChar char="Ø"/>
             </a:pPr>
-            <a:r>
-              <a:rPr lang="ko-KR" altLang="en-US" sz="1600" spc="-50" dirty="0"/>
-              <a:t>인간의 생산과 소비활동은 폐기물을 생성하고</a:t>
-            </a:r>
-            <a:r>
-              <a:rPr lang="en-US" altLang="ko-KR" sz="1600" spc="-50" dirty="0"/>
-              <a:t>, </a:t>
-            </a:r>
-            <a:r>
-              <a:rPr lang="ko-KR" altLang="en-US" sz="1600" spc="-50" dirty="0"/>
-              <a:t>다시 자연으로 돌려보내며</a:t>
-            </a:r>
-            <a:r>
-              <a:rPr lang="en-US" altLang="ko-KR" sz="1600" spc="-50" dirty="0"/>
-              <a:t>, </a:t>
-            </a:r>
-            <a:r>
-              <a:rPr lang="ko-KR" altLang="en-US" sz="1600" spc="-50" dirty="0"/>
-              <a:t>인간이 적절히 처리하지 못하면 환경오염으로 나타난다</a:t>
-            </a:r>
-            <a:r>
-              <a:rPr lang="en-US" altLang="ko-KR" sz="1600" spc="-50" dirty="0"/>
-              <a:t>.</a:t>
-            </a:r>
+            <a:endParaRPr lang="en-US" altLang="ko-KR" sz="1600" spc="-50" dirty="0"/>
           </a:p>
         </p:txBody>
       </p:sp>
@@ -13318,7 +13426,23 @@
             </a:r>
             <a:r>
               <a:rPr lang="en-US" altLang="ko-KR" sz="1600" spc="-50" dirty="0"/>
-              <a:t>.</a:t>
+              <a:t>. (18</a:t>
+            </a:r>
+            <a:r>
+              <a:rPr lang="ko-KR" altLang="en-US" sz="1600" spc="-50" dirty="0"/>
+              <a:t>세기말</a:t>
+            </a:r>
+            <a:r>
+              <a:rPr lang="en-US" altLang="ko-KR" sz="1600" spc="-50" dirty="0"/>
+              <a:t>~19</a:t>
+            </a:r>
+            <a:r>
+              <a:rPr lang="ko-KR" altLang="en-US" sz="1600" spc="-50" dirty="0"/>
+              <a:t>세기 초</a:t>
+            </a:r>
+            <a:r>
+              <a:rPr lang="en-US" altLang="ko-KR" sz="1600" spc="-50" dirty="0"/>
+              <a:t>)</a:t>
             </a:r>
           </a:p>
           <a:p>
@@ -13431,7 +13555,23 @@
             </a:r>
             <a:r>
               <a:rPr lang="en-US" altLang="ko-KR" sz="1600" spc="-50" dirty="0"/>
-              <a:t>.</a:t>
+              <a:t>. (19</a:t>
+            </a:r>
+            <a:r>
+              <a:rPr lang="ko-KR" altLang="en-US" sz="1600" spc="-50" dirty="0"/>
+              <a:t>세기 후반</a:t>
+            </a:r>
+            <a:r>
+              <a:rPr lang="en-US" altLang="ko-KR" sz="1600" spc="-50" dirty="0"/>
+              <a:t>~20</a:t>
+            </a:r>
+            <a:r>
+              <a:rPr lang="ko-KR" altLang="en-US" sz="1600" spc="-50" dirty="0"/>
+              <a:t>세기 초</a:t>
+            </a:r>
+            <a:r>
+              <a:rPr lang="en-US" altLang="ko-KR" sz="1600" spc="-50" dirty="0"/>
+              <a:t>)</a:t>
             </a:r>
           </a:p>
           <a:p>

--- a/환경경제학/2026-1/환경경제학_Chapter_02.pptx
+++ b/환경경제학/2026-1/환경경제학_Chapter_02.pptx
@@ -5,7 +5,7 @@
     <p:sldMasterId id="2147483648" r:id="rId1"/>
   </p:sldMasterIdLst>
   <p:notesMasterIdLst>
-    <p:notesMasterId r:id="rId24"/>
+    <p:notesMasterId r:id="rId23"/>
   </p:notesMasterIdLst>
   <p:sldIdLst>
     <p:sldId id="375" r:id="rId2"/>
@@ -16,20 +16,19 @@
     <p:sldId id="560" r:id="rId7"/>
     <p:sldId id="561" r:id="rId8"/>
     <p:sldId id="562" r:id="rId9"/>
-    <p:sldId id="563" r:id="rId10"/>
-    <p:sldId id="565" r:id="rId11"/>
-    <p:sldId id="566" r:id="rId12"/>
-    <p:sldId id="569" r:id="rId13"/>
-    <p:sldId id="570" r:id="rId14"/>
-    <p:sldId id="572" r:id="rId15"/>
-    <p:sldId id="571" r:id="rId16"/>
-    <p:sldId id="573" r:id="rId17"/>
-    <p:sldId id="574" r:id="rId18"/>
-    <p:sldId id="575" r:id="rId19"/>
-    <p:sldId id="576" r:id="rId20"/>
-    <p:sldId id="577" r:id="rId21"/>
-    <p:sldId id="578" r:id="rId22"/>
-    <p:sldId id="364" r:id="rId23"/>
+    <p:sldId id="565" r:id="rId10"/>
+    <p:sldId id="566" r:id="rId11"/>
+    <p:sldId id="569" r:id="rId12"/>
+    <p:sldId id="570" r:id="rId13"/>
+    <p:sldId id="572" r:id="rId14"/>
+    <p:sldId id="571" r:id="rId15"/>
+    <p:sldId id="573" r:id="rId16"/>
+    <p:sldId id="574" r:id="rId17"/>
+    <p:sldId id="575" r:id="rId18"/>
+    <p:sldId id="576" r:id="rId19"/>
+    <p:sldId id="577" r:id="rId20"/>
+    <p:sldId id="578" r:id="rId21"/>
+    <p:sldId id="364" r:id="rId22"/>
   </p:sldIdLst>
   <p:sldSz cx="12192000" cy="6858000"/>
   <p:notesSz cx="6858000" cy="9144000"/>
@@ -229,7 +228,7 @@
           <a:p>
             <a:fld id="{4A5E00EF-AEA4-43E2-9451-8F9C59A39471}" type="datetimeFigureOut">
               <a:rPr lang="ko-KR" altLang="en-US" smtClean="0"/>
-              <a:t>2026-09-09</a:t>
+              <a:t>2026-09-10</a:t>
             </a:fld>
             <a:endParaRPr lang="ko-KR" altLang="en-US"/>
           </a:p>
@@ -651,7 +650,7 @@
           <a:p>
             <a:fld id="{CD32C56F-BD27-4999-9E6D-D4EACE3DA9F4}" type="datetime1">
               <a:rPr lang="ko-KR" altLang="en-US" smtClean="0"/>
-              <a:t>2026-09-09</a:t>
+              <a:t>2026-09-10</a:t>
             </a:fld>
             <a:endParaRPr lang="ko-KR" altLang="en-US"/>
           </a:p>
@@ -865,7 +864,7 @@
           <a:p>
             <a:fld id="{8EF4A19C-72C8-45CA-8E3F-68A7FA345D6C}" type="datetime1">
               <a:rPr lang="ko-KR" altLang="en-US" smtClean="0"/>
-              <a:t>2026-09-09</a:t>
+              <a:t>2026-09-10</a:t>
             </a:fld>
             <a:endParaRPr lang="ko-KR" altLang="en-US"/>
           </a:p>
@@ -1089,7 +1088,7 @@
           <a:p>
             <a:fld id="{56A175B2-010B-4341-954C-5F8F5C70B124}" type="datetime1">
               <a:rPr lang="ko-KR" altLang="en-US" smtClean="0"/>
-              <a:t>2026-09-09</a:t>
+              <a:t>2026-09-10</a:t>
             </a:fld>
             <a:endParaRPr lang="ko-KR" altLang="en-US"/>
           </a:p>
@@ -1303,7 +1302,7 @@
           <a:p>
             <a:fld id="{16B83F9E-22C9-45CA-9E85-070F1D3EF530}" type="datetime1">
               <a:rPr lang="ko-KR" altLang="en-US" smtClean="0"/>
-              <a:t>2026-09-09</a:t>
+              <a:t>2026-09-10</a:t>
             </a:fld>
             <a:endParaRPr lang="ko-KR" altLang="en-US"/>
           </a:p>
@@ -1594,7 +1593,7 @@
           <a:p>
             <a:fld id="{03278F45-FB3C-4C4D-B89A-7BC3F5F229F6}" type="datetime1">
               <a:rPr lang="ko-KR" altLang="en-US" smtClean="0"/>
-              <a:t>2026-09-09</a:t>
+              <a:t>2026-09-10</a:t>
             </a:fld>
             <a:endParaRPr lang="ko-KR" altLang="en-US"/>
           </a:p>
@@ -1987,7 +1986,7 @@
           <a:p>
             <a:fld id="{38FDAC3C-35A6-415C-9F03-738A6AC328B1}" type="datetime1">
               <a:rPr lang="ko-KR" altLang="en-US" smtClean="0"/>
-              <a:t>2026-09-09</a:t>
+              <a:t>2026-09-10</a:t>
             </a:fld>
             <a:endParaRPr lang="ko-KR" altLang="en-US"/>
           </a:p>
@@ -3581,7 +3580,7 @@
           <a:p>
             <a:fld id="{507A0DF1-AEE6-4B0D-89D2-351E7B3EF65C}" type="datetime1">
               <a:rPr lang="ko-KR" altLang="en-US" smtClean="0"/>
-              <a:t>2026-09-09</a:t>
+              <a:t>2026-09-10</a:t>
             </a:fld>
             <a:endParaRPr lang="ko-KR" altLang="en-US"/>
           </a:p>
@@ -4009,7 +4008,7 @@
           <a:p>
             <a:fld id="{CA93B8C9-630F-4D57-944D-04FD37CECCD3}" type="datetime1">
               <a:rPr lang="ko-KR" altLang="en-US" smtClean="0"/>
-              <a:t>2026-09-09</a:t>
+              <a:t>2026-09-10</a:t>
             </a:fld>
             <a:endParaRPr lang="ko-KR" altLang="en-US"/>
           </a:p>
@@ -4166,7 +4165,7 @@
           <a:p>
             <a:fld id="{E986165A-AC43-4902-9541-874ECD310BA3}" type="datetime1">
               <a:rPr lang="ko-KR" altLang="en-US" smtClean="0"/>
-              <a:t>2026-09-09</a:t>
+              <a:t>2026-09-10</a:t>
             </a:fld>
             <a:endParaRPr lang="ko-KR" altLang="en-US"/>
           </a:p>
@@ -4493,7 +4492,7 @@
           <a:p>
             <a:fld id="{47E6EE6D-2B0E-43A9-87A2-7354CDB998F4}" type="datetime1">
               <a:rPr lang="ko-KR" altLang="en-US" smtClean="0"/>
-              <a:t>2026-09-09</a:t>
+              <a:t>2026-09-10</a:t>
             </a:fld>
             <a:endParaRPr lang="ko-KR" altLang="en-US"/>
           </a:p>
@@ -4797,7 +4796,7 @@
           <a:p>
             <a:fld id="{5CC5944E-0BC8-4FAA-9F94-6B4B05834E10}" type="datetime1">
               <a:rPr lang="ko-KR" altLang="en-US" smtClean="0"/>
-              <a:t>2026-09-09</a:t>
+              <a:t>2026-09-10</a:t>
             </a:fld>
             <a:endParaRPr lang="ko-KR" altLang="en-US"/>
           </a:p>
@@ -7231,435 +7230,6 @@
         <p:cNvPr id="1" name="">
           <a:extLst>
             <a:ext uri="{FF2B5EF4-FFF2-40B4-BE49-F238E27FC236}">
-              <a16:creationId xmlns:a16="http://schemas.microsoft.com/office/drawing/2014/main" id="{99B4BFDE-9DC0-BBE8-141A-E57D71DDA067}"/>
-            </a:ext>
-          </a:extLst>
-        </p:cNvPr>
-        <p:cNvGrpSpPr/>
-        <p:nvPr/>
-      </p:nvGrpSpPr>
-      <p:grpSpPr>
-        <a:xfrm>
-          <a:off x="0" y="0"/>
-          <a:ext cx="0" cy="0"/>
-          <a:chOff x="0" y="0"/>
-          <a:chExt cx="0" cy="0"/>
-        </a:xfrm>
-      </p:grpSpPr>
-      <p:sp>
-        <p:nvSpPr>
-          <p:cNvPr id="2" name="제목 1">
-            <a:extLst>
-              <a:ext uri="{FF2B5EF4-FFF2-40B4-BE49-F238E27FC236}">
-                <a16:creationId xmlns:a16="http://schemas.microsoft.com/office/drawing/2014/main" id="{D63A5E96-0359-D726-9024-BEFE514AE268}"/>
-              </a:ext>
-            </a:extLst>
-          </p:cNvPr>
-          <p:cNvSpPr>
-            <a:spLocks noGrp="1"/>
-          </p:cNvSpPr>
-          <p:nvPr>
-            <p:ph type="title"/>
-          </p:nvPr>
-        </p:nvSpPr>
-        <p:spPr/>
-        <p:txBody>
-          <a:bodyPr/>
-          <a:lstStyle/>
-          <a:p>
-            <a:r>
-              <a:rPr lang="ko-KR" altLang="en-US" dirty="0"/>
-              <a:t>물질균형접근법</a:t>
-            </a:r>
-          </a:p>
-        </p:txBody>
-      </p:sp>
-      <p:sp>
-        <p:nvSpPr>
-          <p:cNvPr id="4" name="슬라이드 번호 개체 틀 3">
-            <a:extLst>
-              <a:ext uri="{FF2B5EF4-FFF2-40B4-BE49-F238E27FC236}">
-                <a16:creationId xmlns:a16="http://schemas.microsoft.com/office/drawing/2014/main" id="{5DC104D6-2F2F-5339-D56E-F422C911DCA2}"/>
-              </a:ext>
-            </a:extLst>
-          </p:cNvPr>
-          <p:cNvSpPr>
-            <a:spLocks noGrp="1"/>
-          </p:cNvSpPr>
-          <p:nvPr>
-            <p:ph type="sldNum" sz="quarter" idx="12"/>
-          </p:nvPr>
-        </p:nvSpPr>
-        <p:spPr/>
-        <p:txBody>
-          <a:bodyPr/>
-          <a:lstStyle/>
-          <a:p>
-            <a:fld id="{109C872D-39A9-4065-8BF3-6A613116E2A1}" type="slidenum">
-              <a:rPr lang="ko-KR" altLang="en-US" smtClean="0"/>
-              <a:t>10</a:t>
-            </a:fld>
-            <a:endParaRPr lang="ko-KR" altLang="en-US"/>
-          </a:p>
-        </p:txBody>
-      </p:sp>
-      <p:sp>
-        <p:nvSpPr>
-          <p:cNvPr id="5" name="TextBox 4">
-            <a:extLst>
-              <a:ext uri="{FF2B5EF4-FFF2-40B4-BE49-F238E27FC236}">
-                <a16:creationId xmlns:a16="http://schemas.microsoft.com/office/drawing/2014/main" id="{F24697DF-1709-FFC3-EFC4-B485F99139B6}"/>
-              </a:ext>
-            </a:extLst>
-          </p:cNvPr>
-          <p:cNvSpPr txBox="1"/>
-          <p:nvPr/>
-        </p:nvSpPr>
-        <p:spPr>
-          <a:xfrm>
-            <a:off x="288790" y="958844"/>
-            <a:ext cx="10707658" cy="5584670"/>
-          </a:xfrm>
-          <a:prstGeom prst="rect">
-            <a:avLst/>
-          </a:prstGeom>
-          <a:noFill/>
-        </p:spPr>
-        <p:txBody>
-          <a:bodyPr wrap="square" rtlCol="0" anchor="t">
-            <a:spAutoFit/>
-          </a:bodyPr>
-          <a:lstStyle/>
-          <a:p>
-            <a:pPr marL="377825" indent="-285750">
-              <a:lnSpc>
-                <a:spcPct val="150000"/>
-              </a:lnSpc>
-              <a:buFont typeface="Arial" panose="020B0604020202020204" pitchFamily="34" charset="0"/>
-              <a:buChar char="•"/>
-            </a:pPr>
-            <a:r>
-              <a:rPr lang="ko-KR" altLang="en-US" sz="1600" spc="-50" dirty="0"/>
-              <a:t>물질균형접근법은 자연과학의 연구 성과를 근거하여</a:t>
-            </a:r>
-            <a:r>
-              <a:rPr lang="en-US" altLang="ko-KR" sz="1600" spc="-50" dirty="0"/>
-              <a:t>, </a:t>
-            </a:r>
-            <a:r>
-              <a:rPr lang="ko-KR" altLang="en-US" sz="1600" spc="-50" dirty="0"/>
-              <a:t>자연으로부터 경제로의 천연자원의 흐름과 경제로부터 자연으로의 폐기물의 흐름은 일종의 균형을 이룬다고 설명한다</a:t>
-            </a:r>
-            <a:r>
-              <a:rPr lang="en-US" altLang="ko-KR" sz="1600" spc="-50" dirty="0"/>
-              <a:t>.</a:t>
-            </a:r>
-          </a:p>
-          <a:p>
-            <a:pPr marL="377825" indent="-285750">
-              <a:lnSpc>
-                <a:spcPct val="150000"/>
-              </a:lnSpc>
-              <a:buFont typeface="Arial" panose="020B0604020202020204" pitchFamily="34" charset="0"/>
-              <a:buChar char="•"/>
-            </a:pPr>
-            <a:endParaRPr lang="en-US" altLang="ko-KR" sz="1600" spc="-50" dirty="0"/>
-          </a:p>
-          <a:p>
-            <a:pPr marL="377825" indent="-285750">
-              <a:lnSpc>
-                <a:spcPct val="150000"/>
-              </a:lnSpc>
-              <a:buFont typeface="Arial" panose="020B0604020202020204" pitchFamily="34" charset="0"/>
-              <a:buChar char="•"/>
-            </a:pPr>
-            <a:r>
-              <a:rPr lang="en-US" altLang="ko-KR" sz="1600" spc="-50" dirty="0"/>
-              <a:t>(</a:t>
-            </a:r>
-            <a:r>
-              <a:rPr lang="ko-KR" altLang="en-US" sz="1600" spc="-50" dirty="0"/>
-              <a:t>열역학 제</a:t>
-            </a:r>
-            <a:r>
-              <a:rPr lang="en-US" altLang="ko-KR" sz="1600" spc="-50" dirty="0"/>
-              <a:t>1</a:t>
-            </a:r>
-            <a:r>
-              <a:rPr lang="ko-KR" altLang="en-US" sz="1600" spc="-50" dirty="0"/>
-              <a:t>법칙</a:t>
-            </a:r>
-            <a:r>
-              <a:rPr lang="en-US" altLang="ko-KR" sz="1600" spc="-50" dirty="0"/>
-              <a:t>) </a:t>
-            </a:r>
-            <a:r>
-              <a:rPr lang="ko-KR" altLang="en-US" sz="1600" spc="-50" dirty="0"/>
-              <a:t>에너지는 형태를 바꿀 수 있지만</a:t>
-            </a:r>
-            <a:r>
-              <a:rPr lang="en-US" altLang="ko-KR" sz="1600" spc="-50" dirty="0"/>
-              <a:t>, </a:t>
-            </a:r>
-            <a:r>
-              <a:rPr lang="ko-KR" altLang="en-US" sz="1600" spc="-50" dirty="0"/>
-              <a:t>총량은 변하지 않는다</a:t>
-            </a:r>
-            <a:r>
-              <a:rPr lang="en-US" altLang="ko-KR" sz="1600" spc="-50" dirty="0"/>
-              <a:t>.</a:t>
-            </a:r>
-          </a:p>
-          <a:p>
-            <a:pPr marL="835025" lvl="1" indent="-285750">
-              <a:lnSpc>
-                <a:spcPct val="150000"/>
-              </a:lnSpc>
-              <a:buFont typeface="Wingdings" panose="05000000000000000000" pitchFamily="2" charset="2"/>
-              <a:buChar char="ü"/>
-            </a:pPr>
-            <a:r>
-              <a:rPr lang="ko-KR" altLang="en-US" sz="1600" spc="-50" dirty="0"/>
-              <a:t>자연으로부터 추출된 물질이나 에너지는 재활용이나 재사용을 통해 잠시 지체될 수 있지만</a:t>
-            </a:r>
-            <a:r>
-              <a:rPr lang="en-US" altLang="ko-KR" sz="1600" spc="-50" dirty="0"/>
-              <a:t> </a:t>
-            </a:r>
-            <a:r>
-              <a:rPr lang="ko-KR" altLang="en-US" sz="1600" spc="-50" dirty="0"/>
-              <a:t>궁극적으로는 동일한 양의 폐기물로 전환되어 자연으로 환원</a:t>
-            </a:r>
-            <a:endParaRPr lang="en-US" altLang="ko-KR" sz="1600" spc="-50" dirty="0"/>
-          </a:p>
-          <a:p>
-            <a:pPr marL="377825" indent="-285750">
-              <a:lnSpc>
-                <a:spcPct val="150000"/>
-              </a:lnSpc>
-              <a:buFont typeface="Arial" panose="020B0604020202020204" pitchFamily="34" charset="0"/>
-              <a:buChar char="•"/>
-            </a:pPr>
-            <a:r>
-              <a:rPr lang="en-US" altLang="ko-KR" sz="1600" spc="-50" dirty="0"/>
-              <a:t>(</a:t>
-            </a:r>
-            <a:r>
-              <a:rPr lang="ko-KR" altLang="en-US" sz="1600" spc="-50" dirty="0"/>
-              <a:t>열역학 제</a:t>
-            </a:r>
-            <a:r>
-              <a:rPr lang="en-US" altLang="ko-KR" sz="1600" spc="-50" dirty="0"/>
-              <a:t>2</a:t>
-            </a:r>
-            <a:r>
-              <a:rPr lang="ko-KR" altLang="en-US" sz="1600" spc="-50" dirty="0"/>
-              <a:t>법칙</a:t>
-            </a:r>
-            <a:r>
-              <a:rPr lang="en-US" altLang="ko-KR" sz="1600" spc="-50" dirty="0"/>
-              <a:t>) </a:t>
-            </a:r>
-            <a:r>
-              <a:rPr lang="ko-KR" altLang="en-US" sz="1600" spc="-50" dirty="0"/>
-              <a:t>엔트로피는 항상 증가하거나 유지 된다</a:t>
-            </a:r>
-            <a:r>
-              <a:rPr lang="en-US" altLang="ko-KR" sz="1600" spc="-50" dirty="0"/>
-              <a:t>. </a:t>
-            </a:r>
-          </a:p>
-          <a:p>
-            <a:pPr marL="835025" lvl="1" indent="-285750">
-              <a:lnSpc>
-                <a:spcPct val="150000"/>
-              </a:lnSpc>
-              <a:buFont typeface="Wingdings" panose="05000000000000000000" pitchFamily="2" charset="2"/>
-              <a:buChar char="ü"/>
-            </a:pPr>
-            <a:r>
-              <a:rPr lang="ko-KR" altLang="en-US" sz="1600" spc="-50" dirty="0"/>
-              <a:t>예</a:t>
-            </a:r>
-            <a:r>
-              <a:rPr lang="en-US" altLang="ko-KR" sz="1600" spc="-50" dirty="0"/>
-              <a:t>: </a:t>
-            </a:r>
-            <a:r>
-              <a:rPr lang="ko-KR" altLang="en-US" sz="1600" spc="-50" dirty="0"/>
-              <a:t>열은 </a:t>
-            </a:r>
-            <a:r>
-              <a:rPr lang="ko-KR" altLang="en-US" sz="1600" spc="-50" dirty="0" err="1"/>
-              <a:t>고온에서</a:t>
-            </a:r>
-            <a:r>
-              <a:rPr lang="ko-KR" altLang="en-US" sz="1600" spc="-50" dirty="0"/>
-              <a:t> 저온으로 흐름</a:t>
-            </a:r>
-            <a:r>
-              <a:rPr lang="en-US" altLang="ko-KR" sz="1600" spc="-50" dirty="0"/>
-              <a:t>. </a:t>
-            </a:r>
-            <a:r>
-              <a:rPr lang="ko-KR" altLang="en-US" sz="1600" spc="-50" dirty="0"/>
-              <a:t>뜨거운 커피는 저절로 식지만</a:t>
-            </a:r>
-            <a:r>
-              <a:rPr lang="en-US" altLang="ko-KR" sz="1600" spc="-50" dirty="0"/>
-              <a:t>, </a:t>
-            </a:r>
-            <a:r>
-              <a:rPr lang="ko-KR" altLang="en-US" sz="1600" spc="-50" dirty="0"/>
-              <a:t>찬 커피는 저절로 뜨거워지지 않는다</a:t>
-            </a:r>
-            <a:r>
-              <a:rPr lang="en-US" altLang="ko-KR" sz="1600" spc="-50" dirty="0"/>
-              <a:t>.</a:t>
-            </a:r>
-          </a:p>
-          <a:p>
-            <a:pPr marL="835025" lvl="1" indent="-285750">
-              <a:lnSpc>
-                <a:spcPct val="150000"/>
-              </a:lnSpc>
-              <a:buFont typeface="Wingdings" panose="05000000000000000000" pitchFamily="2" charset="2"/>
-              <a:buChar char="ü"/>
-            </a:pPr>
-            <a:r>
-              <a:rPr lang="ko-KR" altLang="en-US" sz="1600" spc="-50" dirty="0"/>
-              <a:t>물질이나 에너지의 형태가 전환되는 과정이 거듭될수록 사용할 수 없는 에너지의 양은 점차 증가한다</a:t>
-            </a:r>
-            <a:r>
-              <a:rPr lang="en-US" altLang="ko-KR" sz="1600" spc="-50" dirty="0"/>
-              <a:t>.</a:t>
-            </a:r>
-          </a:p>
-          <a:p>
-            <a:pPr marL="835025" lvl="1" indent="-285750">
-              <a:lnSpc>
-                <a:spcPct val="150000"/>
-              </a:lnSpc>
-              <a:buFont typeface="Wingdings" panose="05000000000000000000" pitchFamily="2" charset="2"/>
-              <a:buChar char="ü"/>
-            </a:pPr>
-            <a:r>
-              <a:rPr lang="ko-KR" altLang="en-US" sz="1600" spc="-50" dirty="0"/>
-              <a:t>따라서 자연과 폐기물 간의 순환관계가 반복되면 결국은 천연자원이 모두 고갈되고</a:t>
-            </a:r>
-            <a:r>
-              <a:rPr lang="en-US" altLang="ko-KR" sz="1600" spc="-50" dirty="0"/>
-              <a:t>, </a:t>
-            </a:r>
-            <a:r>
-              <a:rPr lang="ko-KR" altLang="en-US" sz="1600" spc="-50" dirty="0"/>
-              <a:t>인류의 생존 자체도 불가능하게 된다</a:t>
-            </a:r>
-            <a:r>
-              <a:rPr lang="en-US" altLang="ko-KR" sz="1600" spc="-50" dirty="0"/>
-              <a:t>.</a:t>
-            </a:r>
-          </a:p>
-          <a:p>
-            <a:pPr marL="377825" indent="-285750">
-              <a:lnSpc>
-                <a:spcPct val="150000"/>
-              </a:lnSpc>
-              <a:buFont typeface="Arial" panose="020B0604020202020204" pitchFamily="34" charset="0"/>
-              <a:buChar char="•"/>
-            </a:pPr>
-            <a:endParaRPr lang="en-US" altLang="ko-KR" sz="1600" spc="-50" dirty="0"/>
-          </a:p>
-          <a:p>
-            <a:pPr marL="377825" indent="-285750">
-              <a:lnSpc>
-                <a:spcPct val="150000"/>
-              </a:lnSpc>
-              <a:buFont typeface="Arial" panose="020B0604020202020204" pitchFamily="34" charset="0"/>
-              <a:buChar char="•"/>
-            </a:pPr>
-            <a:r>
-              <a:rPr lang="ko-KR" altLang="en-US" sz="1600" spc="-50" dirty="0"/>
-              <a:t>물질균형접근법은 크게 두 가지 함의를 주고 있다</a:t>
-            </a:r>
-            <a:r>
-              <a:rPr lang="en-US" altLang="ko-KR" sz="1600" spc="-50" dirty="0"/>
-              <a:t>.</a:t>
-            </a:r>
-          </a:p>
-          <a:p>
-            <a:pPr marL="835025" lvl="1" indent="-285750">
-              <a:lnSpc>
-                <a:spcPct val="150000"/>
-              </a:lnSpc>
-              <a:buFont typeface="Wingdings" panose="05000000000000000000" pitchFamily="2" charset="2"/>
-              <a:buChar char="ü"/>
-            </a:pPr>
-            <a:r>
-              <a:rPr lang="ko-KR" altLang="en-US" sz="1600" spc="-50" dirty="0"/>
-              <a:t>첫째</a:t>
-            </a:r>
-            <a:r>
-              <a:rPr lang="en-US" altLang="ko-KR" sz="1600" spc="-50" dirty="0"/>
-              <a:t>, </a:t>
-            </a:r>
-            <a:r>
-              <a:rPr lang="ko-KR" altLang="en-US" sz="1600" spc="-50" dirty="0"/>
-              <a:t>모든 천연자원을 이용하는 경제행위는 환경오염을 유발할 폐기물을 반드시 유출한다</a:t>
-            </a:r>
-            <a:r>
-              <a:rPr lang="en-US" altLang="ko-KR" sz="1600" spc="-50" dirty="0"/>
-              <a:t>.</a:t>
-            </a:r>
-          </a:p>
-          <a:p>
-            <a:pPr marL="835025" lvl="1" indent="-285750">
-              <a:lnSpc>
-                <a:spcPct val="150000"/>
-              </a:lnSpc>
-              <a:buFont typeface="Wingdings" panose="05000000000000000000" pitchFamily="2" charset="2"/>
-              <a:buChar char="ü"/>
-            </a:pPr>
-            <a:r>
-              <a:rPr lang="ko-KR" altLang="en-US" sz="1600" spc="-50" dirty="0"/>
-              <a:t>둘째</a:t>
-            </a:r>
-            <a:r>
-              <a:rPr lang="en-US" altLang="ko-KR" sz="1600" spc="-50" dirty="0"/>
-              <a:t>, </a:t>
-            </a:r>
-            <a:r>
-              <a:rPr lang="ko-KR" altLang="en-US" sz="1600" spc="-50" dirty="0"/>
-              <a:t>천연자원을 다른 형태의 물질이나 에너지로 전환할 수 있는 능력은 제한되어 있다</a:t>
-            </a:r>
-            <a:r>
-              <a:rPr lang="en-US" altLang="ko-KR" sz="1600" spc="-50" dirty="0"/>
-              <a:t>.</a:t>
-            </a:r>
-          </a:p>
-        </p:txBody>
-      </p:sp>
-    </p:spTree>
-    <p:extLst>
-      <p:ext uri="{BB962C8B-B14F-4D97-AF65-F5344CB8AC3E}">
-        <p14:creationId xmlns:p14="http://schemas.microsoft.com/office/powerpoint/2010/main" val="1447001655"/>
-      </p:ext>
-    </p:extLst>
-  </p:cSld>
-  <p:clrMapOvr>
-    <a:masterClrMapping/>
-  </p:clrMapOvr>
-</p:sld>
-</file>
-
-<file path=ppt/slides/slide11.xml><?xml version="1.0" encoding="utf-8"?>
-<p:sld xmlns:a="http://schemas.openxmlformats.org/drawingml/2006/main" xmlns:r="http://schemas.openxmlformats.org/officeDocument/2006/relationships" xmlns:p="http://schemas.openxmlformats.org/presentationml/2006/main">
-  <p:cSld>
-    <p:spTree>
-      <p:nvGrpSpPr>
-        <p:cNvPr id="1" name="">
-          <a:extLst>
-            <a:ext uri="{FF2B5EF4-FFF2-40B4-BE49-F238E27FC236}">
               <a16:creationId xmlns:a16="http://schemas.microsoft.com/office/drawing/2014/main" id="{EBEE54CB-A919-2849-C884-EF6D003FF71F}"/>
             </a:ext>
           </a:extLst>
@@ -7735,7 +7305,7 @@
           <a:p>
             <a:fld id="{109C872D-39A9-4065-8BF3-6A613116E2A1}" type="slidenum">
               <a:rPr lang="ko-KR" altLang="en-US" smtClean="0"/>
-              <a:t>11</a:t>
+              <a:t>10</a:t>
             </a:fld>
             <a:endParaRPr lang="ko-KR" altLang="en-US"/>
           </a:p>
@@ -7795,7 +7365,7 @@
 </p:sld>
 </file>
 
-<file path=ppt/slides/slide12.xml><?xml version="1.0" encoding="utf-8"?>
+<file path=ppt/slides/slide11.xml><?xml version="1.0" encoding="utf-8"?>
 <p:sld xmlns:a="http://schemas.openxmlformats.org/drawingml/2006/main" xmlns:r="http://schemas.openxmlformats.org/officeDocument/2006/relationships" xmlns:p="http://schemas.openxmlformats.org/presentationml/2006/main">
   <p:cSld>
     <p:spTree>
@@ -7869,7 +7439,7 @@
           <a:p>
             <a:fld id="{109C872D-39A9-4065-8BF3-6A613116E2A1}" type="slidenum">
               <a:rPr lang="ko-KR" altLang="en-US" smtClean="0"/>
-              <a:t>12</a:t>
+              <a:t>11</a:t>
             </a:fld>
             <a:endParaRPr lang="ko-KR" altLang="en-US"/>
           </a:p>
@@ -8259,7 +7829,7 @@
 </p:sld>
 </file>
 
-<file path=ppt/slides/slide13.xml><?xml version="1.0" encoding="utf-8"?>
+<file path=ppt/slides/slide12.xml><?xml version="1.0" encoding="utf-8"?>
 <p:sld xmlns:a="http://schemas.openxmlformats.org/drawingml/2006/main" xmlns:r="http://schemas.openxmlformats.org/officeDocument/2006/relationships" xmlns:p="http://schemas.openxmlformats.org/presentationml/2006/main">
   <p:cSld>
     <p:spTree>
@@ -8333,7 +7903,7 @@
           <a:p>
             <a:fld id="{109C872D-39A9-4065-8BF3-6A613116E2A1}" type="slidenum">
               <a:rPr lang="ko-KR" altLang="en-US" smtClean="0"/>
-              <a:t>13</a:t>
+              <a:t>12</a:t>
             </a:fld>
             <a:endParaRPr lang="ko-KR" altLang="en-US"/>
           </a:p>
@@ -8507,7 +8077,7 @@
         </p:nvSpPr>
         <p:spPr>
           <a:xfrm>
-            <a:off x="4270646" y="1450793"/>
+            <a:off x="4130946" y="1450793"/>
             <a:ext cx="283266" cy="283266"/>
           </a:xfrm>
           <a:prstGeom prst="ellipse">
@@ -8573,7 +8143,7 @@
         </p:nvSpPr>
         <p:spPr>
           <a:xfrm>
-            <a:off x="4270646" y="2140294"/>
+            <a:off x="4130946" y="2140294"/>
             <a:ext cx="283266" cy="283266"/>
           </a:xfrm>
           <a:prstGeom prst="ellipse">
@@ -8639,7 +8209,7 @@
         </p:nvSpPr>
         <p:spPr>
           <a:xfrm>
-            <a:off x="4270646" y="3070496"/>
+            <a:off x="4130946" y="3070496"/>
             <a:ext cx="283266" cy="283266"/>
           </a:xfrm>
           <a:prstGeom prst="ellipse">
@@ -8705,7 +8275,7 @@
         </p:nvSpPr>
         <p:spPr>
           <a:xfrm>
-            <a:off x="4270646" y="3743148"/>
+            <a:off x="4130946" y="3743148"/>
             <a:ext cx="283266" cy="283266"/>
           </a:xfrm>
           <a:prstGeom prst="ellipse">
@@ -8771,7 +8341,7 @@
         </p:nvSpPr>
         <p:spPr>
           <a:xfrm>
-            <a:off x="4270646" y="4377611"/>
+            <a:off x="4130946" y="4377611"/>
             <a:ext cx="283266" cy="283266"/>
           </a:xfrm>
           <a:prstGeom prst="ellipse">
@@ -8837,7 +8407,7 @@
         </p:nvSpPr>
         <p:spPr>
           <a:xfrm>
-            <a:off x="4270646" y="4933940"/>
+            <a:off x="4130946" y="4933940"/>
             <a:ext cx="283266" cy="283266"/>
           </a:xfrm>
           <a:prstGeom prst="ellipse">
@@ -8903,7 +8473,7 @@
         </p:nvSpPr>
         <p:spPr>
           <a:xfrm>
-            <a:off x="4270646" y="5715526"/>
+            <a:off x="4130946" y="5715526"/>
             <a:ext cx="283266" cy="283266"/>
           </a:xfrm>
           <a:prstGeom prst="ellipse">
@@ -8971,7 +8541,7 @@
         </p:nvCxnSpPr>
         <p:spPr>
           <a:xfrm>
-            <a:off x="4555941" y="1734059"/>
+            <a:off x="4416241" y="1734059"/>
             <a:ext cx="3708000" cy="0"/>
           </a:xfrm>
           <a:prstGeom prst="line">
@@ -9015,7 +8585,7 @@
         </p:nvCxnSpPr>
         <p:spPr>
           <a:xfrm>
-            <a:off x="4555941" y="2766991"/>
+            <a:off x="4416241" y="2766991"/>
             <a:ext cx="3708000" cy="0"/>
           </a:xfrm>
           <a:prstGeom prst="line">
@@ -9059,7 +8629,7 @@
         </p:nvCxnSpPr>
         <p:spPr>
           <a:xfrm>
-            <a:off x="4555941" y="3626357"/>
+            <a:off x="4416241" y="3626357"/>
             <a:ext cx="3708000" cy="0"/>
           </a:xfrm>
           <a:prstGeom prst="line">
@@ -9103,7 +8673,7 @@
         </p:nvCxnSpPr>
         <p:spPr>
           <a:xfrm>
-            <a:off x="4555941" y="4108957"/>
+            <a:off x="4416241" y="4108957"/>
             <a:ext cx="3708000" cy="0"/>
           </a:xfrm>
           <a:prstGeom prst="line">
@@ -9147,7 +8717,7 @@
         </p:nvCxnSpPr>
         <p:spPr>
           <a:xfrm>
-            <a:off x="4555941" y="5366257"/>
+            <a:off x="4416241" y="5366257"/>
             <a:ext cx="3708000" cy="0"/>
           </a:xfrm>
           <a:prstGeom prst="line">
@@ -9188,7 +8758,7 @@
 </p:sld>
 </file>
 
-<file path=ppt/slides/slide14.xml><?xml version="1.0" encoding="utf-8"?>
+<file path=ppt/slides/slide13.xml><?xml version="1.0" encoding="utf-8"?>
 <p:sld xmlns:a="http://schemas.openxmlformats.org/drawingml/2006/main" xmlns:r="http://schemas.openxmlformats.org/officeDocument/2006/relationships" xmlns:p="http://schemas.openxmlformats.org/presentationml/2006/main">
   <p:cSld>
     <p:spTree>
@@ -9262,7 +8832,7 @@
           <a:p>
             <a:fld id="{109C872D-39A9-4065-8BF3-6A613116E2A1}" type="slidenum">
               <a:rPr lang="ko-KR" altLang="en-US" smtClean="0"/>
-              <a:t>14</a:t>
+              <a:t>13</a:t>
             </a:fld>
             <a:endParaRPr lang="ko-KR" altLang="en-US"/>
           </a:p>
@@ -9340,9 +8910,10 @@
               <a:t>가정이 될 수도 있다</a:t>
             </a:r>
             <a:r>
-              <a:rPr lang="en-US" altLang="ko-KR" sz="1600" spc="-50" dirty="0"/>
-              <a:t>.</a:t>
-            </a:r>
+              <a:rPr lang="en-US" altLang="ko-KR" sz="1600" spc="-50"/>
+              <a:t>.)</a:t>
+            </a:r>
+            <a:endParaRPr lang="en-US" altLang="ko-KR" sz="1600" spc="-50" dirty="0"/>
           </a:p>
           <a:p>
             <a:pPr marL="377825" indent="-285750">
@@ -9910,7 +9481,7 @@
 </p:sld>
 </file>
 
-<file path=ppt/slides/slide15.xml><?xml version="1.0" encoding="utf-8"?>
+<file path=ppt/slides/slide14.xml><?xml version="1.0" encoding="utf-8"?>
 <p:sld xmlns:a="http://schemas.openxmlformats.org/drawingml/2006/main" xmlns:r="http://schemas.openxmlformats.org/officeDocument/2006/relationships" xmlns:p="http://schemas.openxmlformats.org/presentationml/2006/main">
   <p:cSld>
     <p:spTree>
@@ -9984,7 +9555,7 @@
           <a:p>
             <a:fld id="{109C872D-39A9-4065-8BF3-6A613116E2A1}" type="slidenum">
               <a:rPr lang="ko-KR" altLang="en-US" smtClean="0"/>
-              <a:t>15</a:t>
+              <a:t>14</a:t>
             </a:fld>
             <a:endParaRPr lang="ko-KR" altLang="en-US"/>
           </a:p>
@@ -10471,7 +10042,7 @@
 </p:sld>
 </file>
 
-<file path=ppt/slides/slide16.xml><?xml version="1.0" encoding="utf-8"?>
+<file path=ppt/slides/slide15.xml><?xml version="1.0" encoding="utf-8"?>
 <p:sld xmlns:a="http://schemas.openxmlformats.org/drawingml/2006/main" xmlns:r="http://schemas.openxmlformats.org/officeDocument/2006/relationships" xmlns:p="http://schemas.openxmlformats.org/presentationml/2006/main">
   <p:cSld>
     <p:spTree>
@@ -10554,7 +10125,7 @@
           <a:p>
             <a:fld id="{109C872D-39A9-4065-8BF3-6A613116E2A1}" type="slidenum">
               <a:rPr lang="ko-KR" altLang="en-US" smtClean="0"/>
-              <a:t>16</a:t>
+              <a:t>15</a:t>
             </a:fld>
             <a:endParaRPr lang="ko-KR" altLang="en-US"/>
           </a:p>
@@ -10614,7 +10185,7 @@
 </p:sld>
 </file>
 
-<file path=ppt/slides/slide17.xml><?xml version="1.0" encoding="utf-8"?>
+<file path=ppt/slides/slide16.xml><?xml version="1.0" encoding="utf-8"?>
 <p:sld xmlns:a="http://schemas.openxmlformats.org/drawingml/2006/main" xmlns:r="http://schemas.openxmlformats.org/officeDocument/2006/relationships" xmlns:p="http://schemas.openxmlformats.org/presentationml/2006/main">
   <p:cSld>
     <p:spTree>
@@ -11025,7 +10596,7 @@
           <a:p>
             <a:fld id="{109C872D-39A9-4065-8BF3-6A613116E2A1}" type="slidenum">
               <a:rPr lang="ko-KR" altLang="en-US" smtClean="0"/>
-              <a:t>17</a:t>
+              <a:t>16</a:t>
             </a:fld>
             <a:endParaRPr lang="ko-KR" altLang="en-US"/>
           </a:p>
@@ -11044,7 +10615,7 @@
 </p:sld>
 </file>
 
-<file path=ppt/slides/slide18.xml><?xml version="1.0" encoding="utf-8"?>
+<file path=ppt/slides/slide17.xml><?xml version="1.0" encoding="utf-8"?>
 <p:sld xmlns:a="http://schemas.openxmlformats.org/drawingml/2006/main" xmlns:r="http://schemas.openxmlformats.org/officeDocument/2006/relationships" xmlns:p="http://schemas.openxmlformats.org/presentationml/2006/main">
   <p:cSld>
     <p:spTree>
@@ -11457,7 +11028,7 @@
           <a:p>
             <a:fld id="{109C872D-39A9-4065-8BF3-6A613116E2A1}" type="slidenum">
               <a:rPr lang="ko-KR" altLang="en-US" smtClean="0"/>
-              <a:t>18</a:t>
+              <a:t>17</a:t>
             </a:fld>
             <a:endParaRPr lang="ko-KR" altLang="en-US"/>
           </a:p>
@@ -11476,7 +11047,7 @@
 </p:sld>
 </file>
 
-<file path=ppt/slides/slide19.xml><?xml version="1.0" encoding="utf-8"?>
+<file path=ppt/slides/slide18.xml><?xml version="1.0" encoding="utf-8"?>
 <p:sld xmlns:a="http://schemas.openxmlformats.org/drawingml/2006/main" xmlns:r="http://schemas.openxmlformats.org/officeDocument/2006/relationships" xmlns:p="http://schemas.openxmlformats.org/presentationml/2006/main">
   <p:cSld>
     <p:spTree>
@@ -11741,7 +11312,7 @@
           <a:p>
             <a:fld id="{109C872D-39A9-4065-8BF3-6A613116E2A1}" type="slidenum">
               <a:rPr lang="ko-KR" altLang="en-US" smtClean="0"/>
-              <a:t>19</a:t>
+              <a:t>18</a:t>
             </a:fld>
             <a:endParaRPr lang="ko-KR" altLang="en-US"/>
           </a:p>
@@ -11751,6 +11322,345 @@
     <p:extLst>
       <p:ext uri="{BB962C8B-B14F-4D97-AF65-F5344CB8AC3E}">
         <p14:creationId xmlns:p14="http://schemas.microsoft.com/office/powerpoint/2010/main" val="456520360"/>
+      </p:ext>
+    </p:extLst>
+  </p:cSld>
+  <p:clrMapOvr>
+    <a:masterClrMapping/>
+  </p:clrMapOvr>
+</p:sld>
+</file>
+
+<file path=ppt/slides/slide19.xml><?xml version="1.0" encoding="utf-8"?>
+<p:sld xmlns:a="http://schemas.openxmlformats.org/drawingml/2006/main" xmlns:r="http://schemas.openxmlformats.org/officeDocument/2006/relationships" xmlns:p="http://schemas.openxmlformats.org/presentationml/2006/main">
+  <p:cSld>
+    <p:spTree>
+      <p:nvGrpSpPr>
+        <p:cNvPr id="1" name="">
+          <a:extLst>
+            <a:ext uri="{FF2B5EF4-FFF2-40B4-BE49-F238E27FC236}">
+              <a16:creationId xmlns:a16="http://schemas.microsoft.com/office/drawing/2014/main" id="{66916E06-0C10-EC94-898B-D287ADCFCB4D}"/>
+            </a:ext>
+          </a:extLst>
+        </p:cNvPr>
+        <p:cNvGrpSpPr/>
+        <p:nvPr/>
+      </p:nvGrpSpPr>
+      <p:grpSpPr>
+        <a:xfrm>
+          <a:off x="0" y="0"/>
+          <a:ext cx="0" cy="0"/>
+          <a:chOff x="0" y="0"/>
+          <a:chExt cx="0" cy="0"/>
+        </a:xfrm>
+      </p:grpSpPr>
+      <p:sp>
+        <p:nvSpPr>
+          <p:cNvPr id="6" name="TextBox 5">
+            <a:extLst>
+              <a:ext uri="{FF2B5EF4-FFF2-40B4-BE49-F238E27FC236}">
+                <a16:creationId xmlns:a16="http://schemas.microsoft.com/office/drawing/2014/main" id="{1EA1BBB4-E0F1-8168-8B6D-A8C1479776E8}"/>
+              </a:ext>
+            </a:extLst>
+          </p:cNvPr>
+          <p:cNvSpPr txBox="1"/>
+          <p:nvPr/>
+        </p:nvSpPr>
+        <p:spPr>
+          <a:xfrm>
+            <a:off x="288790" y="958844"/>
+            <a:ext cx="10707658" cy="3368679"/>
+          </a:xfrm>
+          <a:prstGeom prst="rect">
+            <a:avLst/>
+          </a:prstGeom>
+          <a:noFill/>
+        </p:spPr>
+        <p:txBody>
+          <a:bodyPr wrap="square" rtlCol="0" anchor="t">
+            <a:spAutoFit/>
+          </a:bodyPr>
+          <a:lstStyle/>
+          <a:p>
+            <a:pPr marL="377825" indent="-285750">
+              <a:lnSpc>
+                <a:spcPct val="150000"/>
+              </a:lnSpc>
+              <a:buFont typeface="Arial" panose="020B0604020202020204" pitchFamily="34" charset="0"/>
+              <a:buChar char="•"/>
+            </a:pPr>
+            <a:r>
+              <a:rPr lang="en-US" altLang="ko-KR" sz="1600" spc="-50" dirty="0"/>
+              <a:t>(</a:t>
+            </a:r>
+            <a:r>
+              <a:rPr lang="ko-KR" altLang="en-US" sz="1600" spc="-50" dirty="0"/>
+              <a:t>점원 </a:t>
+            </a:r>
+            <a:r>
+              <a:rPr lang="en-US" altLang="ko-KR" sz="1600" spc="-50" dirty="0"/>
+              <a:t>vs. </a:t>
+            </a:r>
+            <a:r>
+              <a:rPr lang="ko-KR" altLang="en-US" sz="1600" spc="-50" dirty="0" err="1"/>
+              <a:t>비점원</a:t>
+            </a:r>
+            <a:r>
+              <a:rPr lang="ko-KR" altLang="en-US" sz="1600" spc="-50" dirty="0"/>
+              <a:t> 오염물질</a:t>
+            </a:r>
+            <a:r>
+              <a:rPr lang="en-US" altLang="ko-KR" sz="1600" spc="-50" dirty="0"/>
+              <a:t>) </a:t>
+            </a:r>
+            <a:r>
+              <a:rPr lang="ko-KR" altLang="en-US" sz="1600" spc="-50" dirty="0"/>
+              <a:t>오염물질이 영향을 미치는 수직적 범위에 따라 분류</a:t>
+            </a:r>
+            <a:endParaRPr lang="en-US" altLang="ko-KR" sz="1600" spc="-50" dirty="0"/>
+          </a:p>
+          <a:p>
+            <a:pPr marL="835025" lvl="1" indent="-285750">
+              <a:lnSpc>
+                <a:spcPct val="150000"/>
+              </a:lnSpc>
+              <a:buFont typeface="Wingdings" panose="05000000000000000000" pitchFamily="2" charset="2"/>
+              <a:buChar char="ü"/>
+            </a:pPr>
+            <a:r>
+              <a:rPr lang="ko-KR" altLang="en-US" sz="1600" spc="-50" dirty="0"/>
+              <a:t>점원 오염물질</a:t>
+            </a:r>
+            <a:r>
+              <a:rPr lang="en-US" altLang="ko-KR" sz="1600" spc="-50" dirty="0"/>
+              <a:t>:</a:t>
+            </a:r>
+            <a:r>
+              <a:rPr lang="ko-KR" altLang="en-US" sz="1600" spc="-50" dirty="0"/>
+              <a:t> 하나의 지점을 통해 오염물질이 배출되는 경우</a:t>
+            </a:r>
+            <a:endParaRPr lang="en-US" altLang="ko-KR" sz="1600" spc="-50" dirty="0"/>
+          </a:p>
+          <a:p>
+            <a:pPr marL="1292225" lvl="2" indent="-285750">
+              <a:lnSpc>
+                <a:spcPct val="150000"/>
+              </a:lnSpc>
+              <a:buFont typeface="Wingdings" panose="05000000000000000000" pitchFamily="2" charset="2"/>
+              <a:buChar char="Ø"/>
+            </a:pPr>
+            <a:r>
+              <a:rPr lang="ko-KR" altLang="en-US" sz="1600" spc="-50" dirty="0"/>
+              <a:t>점원 오염물질은 오염원으로부터 얼마나 배출되는지 정확히 알 수 있다</a:t>
+            </a:r>
+            <a:r>
+              <a:rPr lang="en-US" altLang="ko-KR" sz="1600" spc="-50" dirty="0"/>
+              <a:t>.</a:t>
+            </a:r>
+          </a:p>
+          <a:p>
+            <a:pPr marL="1292225" lvl="2" indent="-285750">
+              <a:lnSpc>
+                <a:spcPct val="150000"/>
+              </a:lnSpc>
+              <a:buFont typeface="Wingdings" panose="05000000000000000000" pitchFamily="2" charset="2"/>
+              <a:buChar char="Ø"/>
+            </a:pPr>
+            <a:r>
+              <a:rPr lang="ko-KR" altLang="en-US" sz="1600" spc="-50" dirty="0"/>
+              <a:t>공장의 굴뚝이나</a:t>
+            </a:r>
+            <a:r>
+              <a:rPr lang="en-US" altLang="ko-KR" sz="1600" spc="-50" dirty="0"/>
+              <a:t>, </a:t>
+            </a:r>
+            <a:r>
+              <a:rPr lang="ko-KR" altLang="en-US" sz="1600" spc="-50" dirty="0"/>
+              <a:t>폐수처리장이 점원의 대표적인 예이다</a:t>
+            </a:r>
+            <a:r>
+              <a:rPr lang="en-US" altLang="ko-KR" sz="1600" spc="-50" dirty="0"/>
+              <a:t>.</a:t>
+            </a:r>
+          </a:p>
+          <a:p>
+            <a:pPr marL="892175" lvl="1" indent="-342900">
+              <a:lnSpc>
+                <a:spcPct val="150000"/>
+              </a:lnSpc>
+              <a:buFont typeface="Wingdings" panose="05000000000000000000" pitchFamily="2" charset="2"/>
+              <a:buChar char="ü"/>
+            </a:pPr>
+            <a:r>
+              <a:rPr lang="ko-KR" altLang="en-US" sz="1600" spc="-50" dirty="0" err="1"/>
+              <a:t>비점원</a:t>
+            </a:r>
+            <a:r>
+              <a:rPr lang="ko-KR" altLang="en-US" sz="1600" spc="-50" dirty="0"/>
+              <a:t> 오염물질</a:t>
+            </a:r>
+            <a:r>
+              <a:rPr lang="en-US" altLang="ko-KR" sz="1600" spc="-50" dirty="0"/>
+              <a:t>: </a:t>
+            </a:r>
+            <a:r>
+              <a:rPr lang="ko-KR" altLang="en-US" sz="1600" spc="-50" dirty="0"/>
+              <a:t>넓은 지역에서 오염물질이 배출되는 경우</a:t>
+            </a:r>
+            <a:endParaRPr lang="en-US" altLang="ko-KR" sz="1600" spc="-50" dirty="0"/>
+          </a:p>
+          <a:p>
+            <a:pPr marL="1292225" lvl="2" indent="-285750">
+              <a:lnSpc>
+                <a:spcPct val="150000"/>
+              </a:lnSpc>
+              <a:buFont typeface="Wingdings" panose="05000000000000000000" pitchFamily="2" charset="2"/>
+              <a:buChar char="Ø"/>
+            </a:pPr>
+            <a:r>
+              <a:rPr lang="ko-KR" altLang="en-US" sz="1600" spc="-50" dirty="0" err="1"/>
+              <a:t>비점원</a:t>
+            </a:r>
+            <a:r>
+              <a:rPr lang="ko-KR" altLang="en-US" sz="1600" spc="-50" dirty="0"/>
+              <a:t> 오염물질은 비교적 넓은 지역의 환경을 불분명한 경로를 거쳐 오염시킨다</a:t>
+            </a:r>
+            <a:r>
+              <a:rPr lang="en-US" altLang="ko-KR" sz="1600" spc="-50" dirty="0"/>
+              <a:t>.</a:t>
+            </a:r>
+          </a:p>
+          <a:p>
+            <a:pPr marL="1292225" lvl="2" indent="-285750">
+              <a:lnSpc>
+                <a:spcPct val="150000"/>
+              </a:lnSpc>
+              <a:buFont typeface="Wingdings" panose="05000000000000000000" pitchFamily="2" charset="2"/>
+              <a:buChar char="Ø"/>
+            </a:pPr>
+            <a:r>
+              <a:rPr lang="ko-KR" altLang="en-US" sz="1600" spc="-50" dirty="0"/>
+              <a:t>농경지의 농약</a:t>
+            </a:r>
+            <a:r>
+              <a:rPr lang="en-US" altLang="ko-KR" sz="1600" spc="-50" dirty="0"/>
+              <a:t>, </a:t>
+            </a:r>
+            <a:r>
+              <a:rPr lang="ko-KR" altLang="en-US" sz="1600" spc="-50" dirty="0"/>
+              <a:t>비료에 의한 수질오염</a:t>
+            </a:r>
+            <a:r>
+              <a:rPr lang="en-US" altLang="ko-KR" sz="1600" spc="-50" dirty="0"/>
+              <a:t>, </a:t>
+            </a:r>
+            <a:r>
+              <a:rPr lang="ko-KR" altLang="en-US" sz="1600" spc="-50" dirty="0"/>
+              <a:t>건설 현장 폐자재로 인한 오염 등이 대표적인 예이다</a:t>
+            </a:r>
+            <a:r>
+              <a:rPr lang="en-US" altLang="ko-KR" sz="1600" spc="-50" dirty="0"/>
+              <a:t>.</a:t>
+            </a:r>
+          </a:p>
+          <a:p>
+            <a:pPr marL="1292225" lvl="2" indent="-285750">
+              <a:lnSpc>
+                <a:spcPct val="150000"/>
+              </a:lnSpc>
+              <a:buFont typeface="Wingdings" panose="05000000000000000000" pitchFamily="2" charset="2"/>
+              <a:buChar char="Ø"/>
+            </a:pPr>
+            <a:endParaRPr lang="en-US" altLang="ko-KR" sz="1600" spc="-50" dirty="0"/>
+          </a:p>
+          <a:p>
+            <a:pPr marL="377825" indent="-285750">
+              <a:lnSpc>
+                <a:spcPct val="150000"/>
+              </a:lnSpc>
+              <a:buFont typeface="Arial" panose="020B0604020202020204" pitchFamily="34" charset="0"/>
+              <a:buChar char="•"/>
+            </a:pPr>
+            <a:r>
+              <a:rPr lang="ko-KR" altLang="en-US" sz="1600" spc="-50" dirty="0"/>
+              <a:t>점원오염은 오염원이나 오염경로를 정확히 파악할 수 있기 </a:t>
+            </a:r>
+            <a:r>
+              <a:rPr lang="ko-KR" altLang="en-US" sz="1600" spc="-50" dirty="0" err="1"/>
+              <a:t>떄문에</a:t>
+            </a:r>
+            <a:r>
+              <a:rPr lang="ko-KR" altLang="en-US" sz="1600" spc="-50" dirty="0"/>
+              <a:t> 관리가 상대적으로 쉽다</a:t>
+            </a:r>
+            <a:r>
+              <a:rPr lang="en-US" altLang="ko-KR" sz="1600" spc="-50" dirty="0"/>
+              <a:t>.</a:t>
+            </a:r>
+          </a:p>
+        </p:txBody>
+      </p:sp>
+      <p:sp>
+        <p:nvSpPr>
+          <p:cNvPr id="2" name="제목 1">
+            <a:extLst>
+              <a:ext uri="{FF2B5EF4-FFF2-40B4-BE49-F238E27FC236}">
+                <a16:creationId xmlns:a16="http://schemas.microsoft.com/office/drawing/2014/main" id="{CC3627F6-B75C-160F-D323-A1CAD77F2BB2}"/>
+              </a:ext>
+            </a:extLst>
+          </p:cNvPr>
+          <p:cNvSpPr>
+            <a:spLocks noGrp="1"/>
+          </p:cNvSpPr>
+          <p:nvPr>
+            <p:ph type="title"/>
+          </p:nvPr>
+        </p:nvSpPr>
+        <p:spPr/>
+        <p:txBody>
+          <a:bodyPr/>
+          <a:lstStyle/>
+          <a:p>
+            <a:r>
+              <a:rPr lang="ko-KR" altLang="en-US" dirty="0"/>
+              <a:t>오염물질의 종류</a:t>
+            </a:r>
+          </a:p>
+        </p:txBody>
+      </p:sp>
+      <p:sp>
+        <p:nvSpPr>
+          <p:cNvPr id="4" name="슬라이드 번호 개체 틀 3">
+            <a:extLst>
+              <a:ext uri="{FF2B5EF4-FFF2-40B4-BE49-F238E27FC236}">
+                <a16:creationId xmlns:a16="http://schemas.microsoft.com/office/drawing/2014/main" id="{D00C19D3-8921-4E64-BDE9-97C785D39AEA}"/>
+              </a:ext>
+            </a:extLst>
+          </p:cNvPr>
+          <p:cNvSpPr>
+            <a:spLocks noGrp="1"/>
+          </p:cNvSpPr>
+          <p:nvPr>
+            <p:ph type="sldNum" sz="quarter" idx="12"/>
+          </p:nvPr>
+        </p:nvSpPr>
+        <p:spPr/>
+        <p:txBody>
+          <a:bodyPr/>
+          <a:lstStyle/>
+          <a:p>
+            <a:fld id="{109C872D-39A9-4065-8BF3-6A613116E2A1}" type="slidenum">
+              <a:rPr lang="ko-KR" altLang="en-US" smtClean="0"/>
+              <a:t>19</a:t>
+            </a:fld>
+            <a:endParaRPr lang="ko-KR" altLang="en-US"/>
+          </a:p>
+        </p:txBody>
+      </p:sp>
+    </p:spTree>
+    <p:extLst>
+      <p:ext uri="{BB962C8B-B14F-4D97-AF65-F5344CB8AC3E}">
+        <p14:creationId xmlns:p14="http://schemas.microsoft.com/office/powerpoint/2010/main" val="2180032017"/>
       </p:ext>
     </p:extLst>
   </p:cSld>
@@ -11917,345 +11827,6 @@
         <p:cNvPr id="1" name="">
           <a:extLst>
             <a:ext uri="{FF2B5EF4-FFF2-40B4-BE49-F238E27FC236}">
-              <a16:creationId xmlns:a16="http://schemas.microsoft.com/office/drawing/2014/main" id="{66916E06-0C10-EC94-898B-D287ADCFCB4D}"/>
-            </a:ext>
-          </a:extLst>
-        </p:cNvPr>
-        <p:cNvGrpSpPr/>
-        <p:nvPr/>
-      </p:nvGrpSpPr>
-      <p:grpSpPr>
-        <a:xfrm>
-          <a:off x="0" y="0"/>
-          <a:ext cx="0" cy="0"/>
-          <a:chOff x="0" y="0"/>
-          <a:chExt cx="0" cy="0"/>
-        </a:xfrm>
-      </p:grpSpPr>
-      <p:sp>
-        <p:nvSpPr>
-          <p:cNvPr id="6" name="TextBox 5">
-            <a:extLst>
-              <a:ext uri="{FF2B5EF4-FFF2-40B4-BE49-F238E27FC236}">
-                <a16:creationId xmlns:a16="http://schemas.microsoft.com/office/drawing/2014/main" id="{1EA1BBB4-E0F1-8168-8B6D-A8C1479776E8}"/>
-              </a:ext>
-            </a:extLst>
-          </p:cNvPr>
-          <p:cNvSpPr txBox="1"/>
-          <p:nvPr/>
-        </p:nvSpPr>
-        <p:spPr>
-          <a:xfrm>
-            <a:off x="288790" y="958844"/>
-            <a:ext cx="10707658" cy="3368679"/>
-          </a:xfrm>
-          <a:prstGeom prst="rect">
-            <a:avLst/>
-          </a:prstGeom>
-          <a:noFill/>
-        </p:spPr>
-        <p:txBody>
-          <a:bodyPr wrap="square" rtlCol="0" anchor="t">
-            <a:spAutoFit/>
-          </a:bodyPr>
-          <a:lstStyle/>
-          <a:p>
-            <a:pPr marL="377825" indent="-285750">
-              <a:lnSpc>
-                <a:spcPct val="150000"/>
-              </a:lnSpc>
-              <a:buFont typeface="Arial" panose="020B0604020202020204" pitchFamily="34" charset="0"/>
-              <a:buChar char="•"/>
-            </a:pPr>
-            <a:r>
-              <a:rPr lang="en-US" altLang="ko-KR" sz="1600" spc="-50" dirty="0"/>
-              <a:t>(</a:t>
-            </a:r>
-            <a:r>
-              <a:rPr lang="ko-KR" altLang="en-US" sz="1600" spc="-50" dirty="0"/>
-              <a:t>점원 </a:t>
-            </a:r>
-            <a:r>
-              <a:rPr lang="en-US" altLang="ko-KR" sz="1600" spc="-50" dirty="0"/>
-              <a:t>vs. </a:t>
-            </a:r>
-            <a:r>
-              <a:rPr lang="ko-KR" altLang="en-US" sz="1600" spc="-50" dirty="0" err="1"/>
-              <a:t>비점원</a:t>
-            </a:r>
-            <a:r>
-              <a:rPr lang="ko-KR" altLang="en-US" sz="1600" spc="-50" dirty="0"/>
-              <a:t> 오염물질</a:t>
-            </a:r>
-            <a:r>
-              <a:rPr lang="en-US" altLang="ko-KR" sz="1600" spc="-50" dirty="0"/>
-              <a:t>) </a:t>
-            </a:r>
-            <a:r>
-              <a:rPr lang="ko-KR" altLang="en-US" sz="1600" spc="-50" dirty="0"/>
-              <a:t>오염물질이 영향을 미치는 수직적 범위에 따라 분류</a:t>
-            </a:r>
-            <a:endParaRPr lang="en-US" altLang="ko-KR" sz="1600" spc="-50" dirty="0"/>
-          </a:p>
-          <a:p>
-            <a:pPr marL="835025" lvl="1" indent="-285750">
-              <a:lnSpc>
-                <a:spcPct val="150000"/>
-              </a:lnSpc>
-              <a:buFont typeface="Wingdings" panose="05000000000000000000" pitchFamily="2" charset="2"/>
-              <a:buChar char="ü"/>
-            </a:pPr>
-            <a:r>
-              <a:rPr lang="ko-KR" altLang="en-US" sz="1600" spc="-50" dirty="0"/>
-              <a:t>점원 오염물질</a:t>
-            </a:r>
-            <a:r>
-              <a:rPr lang="en-US" altLang="ko-KR" sz="1600" spc="-50" dirty="0"/>
-              <a:t>:</a:t>
-            </a:r>
-            <a:r>
-              <a:rPr lang="ko-KR" altLang="en-US" sz="1600" spc="-50" dirty="0"/>
-              <a:t> 하나의 지점을 통해 오염물질이 배출되는 경우</a:t>
-            </a:r>
-            <a:endParaRPr lang="en-US" altLang="ko-KR" sz="1600" spc="-50" dirty="0"/>
-          </a:p>
-          <a:p>
-            <a:pPr marL="1292225" lvl="2" indent="-285750">
-              <a:lnSpc>
-                <a:spcPct val="150000"/>
-              </a:lnSpc>
-              <a:buFont typeface="Wingdings" panose="05000000000000000000" pitchFamily="2" charset="2"/>
-              <a:buChar char="Ø"/>
-            </a:pPr>
-            <a:r>
-              <a:rPr lang="ko-KR" altLang="en-US" sz="1600" spc="-50" dirty="0"/>
-              <a:t>점원 오염물질은 오염원으로부터 얼마나 배출되는지 정확히 알 수 있다</a:t>
-            </a:r>
-            <a:r>
-              <a:rPr lang="en-US" altLang="ko-KR" sz="1600" spc="-50" dirty="0"/>
-              <a:t>.</a:t>
-            </a:r>
-          </a:p>
-          <a:p>
-            <a:pPr marL="1292225" lvl="2" indent="-285750">
-              <a:lnSpc>
-                <a:spcPct val="150000"/>
-              </a:lnSpc>
-              <a:buFont typeface="Wingdings" panose="05000000000000000000" pitchFamily="2" charset="2"/>
-              <a:buChar char="Ø"/>
-            </a:pPr>
-            <a:r>
-              <a:rPr lang="ko-KR" altLang="en-US" sz="1600" spc="-50" dirty="0"/>
-              <a:t>공장의 굴뚝이나</a:t>
-            </a:r>
-            <a:r>
-              <a:rPr lang="en-US" altLang="ko-KR" sz="1600" spc="-50" dirty="0"/>
-              <a:t>, </a:t>
-            </a:r>
-            <a:r>
-              <a:rPr lang="ko-KR" altLang="en-US" sz="1600" spc="-50" dirty="0"/>
-              <a:t>폐수처리장이 점원의 대표적인 예이다</a:t>
-            </a:r>
-            <a:r>
-              <a:rPr lang="en-US" altLang="ko-KR" sz="1600" spc="-50" dirty="0"/>
-              <a:t>.</a:t>
-            </a:r>
-          </a:p>
-          <a:p>
-            <a:pPr marL="892175" lvl="1" indent="-342900">
-              <a:lnSpc>
-                <a:spcPct val="150000"/>
-              </a:lnSpc>
-              <a:buFont typeface="Wingdings" panose="05000000000000000000" pitchFamily="2" charset="2"/>
-              <a:buChar char="ü"/>
-            </a:pPr>
-            <a:r>
-              <a:rPr lang="ko-KR" altLang="en-US" sz="1600" spc="-50" dirty="0" err="1"/>
-              <a:t>비점원</a:t>
-            </a:r>
-            <a:r>
-              <a:rPr lang="ko-KR" altLang="en-US" sz="1600" spc="-50" dirty="0"/>
-              <a:t> 오염물질</a:t>
-            </a:r>
-            <a:r>
-              <a:rPr lang="en-US" altLang="ko-KR" sz="1600" spc="-50" dirty="0"/>
-              <a:t>: </a:t>
-            </a:r>
-            <a:r>
-              <a:rPr lang="ko-KR" altLang="en-US" sz="1600" spc="-50" dirty="0"/>
-              <a:t>넓은 지역에서 오염물질이 배출되는 경우</a:t>
-            </a:r>
-            <a:endParaRPr lang="en-US" altLang="ko-KR" sz="1600" spc="-50" dirty="0"/>
-          </a:p>
-          <a:p>
-            <a:pPr marL="1292225" lvl="2" indent="-285750">
-              <a:lnSpc>
-                <a:spcPct val="150000"/>
-              </a:lnSpc>
-              <a:buFont typeface="Wingdings" panose="05000000000000000000" pitchFamily="2" charset="2"/>
-              <a:buChar char="Ø"/>
-            </a:pPr>
-            <a:r>
-              <a:rPr lang="ko-KR" altLang="en-US" sz="1600" spc="-50" dirty="0" err="1"/>
-              <a:t>비점원</a:t>
-            </a:r>
-            <a:r>
-              <a:rPr lang="ko-KR" altLang="en-US" sz="1600" spc="-50" dirty="0"/>
-              <a:t> 오염물질은 비교적 넓은 지역의 환경을 불분명한 경로를 거쳐 오염시킨다</a:t>
-            </a:r>
-            <a:r>
-              <a:rPr lang="en-US" altLang="ko-KR" sz="1600" spc="-50" dirty="0"/>
-              <a:t>.</a:t>
-            </a:r>
-          </a:p>
-          <a:p>
-            <a:pPr marL="1292225" lvl="2" indent="-285750">
-              <a:lnSpc>
-                <a:spcPct val="150000"/>
-              </a:lnSpc>
-              <a:buFont typeface="Wingdings" panose="05000000000000000000" pitchFamily="2" charset="2"/>
-              <a:buChar char="Ø"/>
-            </a:pPr>
-            <a:r>
-              <a:rPr lang="ko-KR" altLang="en-US" sz="1600" spc="-50" dirty="0"/>
-              <a:t>농경지의 농약</a:t>
-            </a:r>
-            <a:r>
-              <a:rPr lang="en-US" altLang="ko-KR" sz="1600" spc="-50" dirty="0"/>
-              <a:t>, </a:t>
-            </a:r>
-            <a:r>
-              <a:rPr lang="ko-KR" altLang="en-US" sz="1600" spc="-50" dirty="0"/>
-              <a:t>비료에 의한 수질오염</a:t>
-            </a:r>
-            <a:r>
-              <a:rPr lang="en-US" altLang="ko-KR" sz="1600" spc="-50" dirty="0"/>
-              <a:t>, </a:t>
-            </a:r>
-            <a:r>
-              <a:rPr lang="ko-KR" altLang="en-US" sz="1600" spc="-50" dirty="0"/>
-              <a:t>건설 현장 폐자재로 인한 오염 등이 대표적인 예이다</a:t>
-            </a:r>
-            <a:r>
-              <a:rPr lang="en-US" altLang="ko-KR" sz="1600" spc="-50" dirty="0"/>
-              <a:t>.</a:t>
-            </a:r>
-          </a:p>
-          <a:p>
-            <a:pPr marL="1292225" lvl="2" indent="-285750">
-              <a:lnSpc>
-                <a:spcPct val="150000"/>
-              </a:lnSpc>
-              <a:buFont typeface="Wingdings" panose="05000000000000000000" pitchFamily="2" charset="2"/>
-              <a:buChar char="Ø"/>
-            </a:pPr>
-            <a:endParaRPr lang="en-US" altLang="ko-KR" sz="1600" spc="-50" dirty="0"/>
-          </a:p>
-          <a:p>
-            <a:pPr marL="377825" indent="-285750">
-              <a:lnSpc>
-                <a:spcPct val="150000"/>
-              </a:lnSpc>
-              <a:buFont typeface="Arial" panose="020B0604020202020204" pitchFamily="34" charset="0"/>
-              <a:buChar char="•"/>
-            </a:pPr>
-            <a:r>
-              <a:rPr lang="ko-KR" altLang="en-US" sz="1600" spc="-50" dirty="0"/>
-              <a:t>점원오염은 오염원이나 오염경로를 정확히 파악할 수 있기 </a:t>
-            </a:r>
-            <a:r>
-              <a:rPr lang="ko-KR" altLang="en-US" sz="1600" spc="-50" dirty="0" err="1"/>
-              <a:t>떄문에</a:t>
-            </a:r>
-            <a:r>
-              <a:rPr lang="ko-KR" altLang="en-US" sz="1600" spc="-50" dirty="0"/>
-              <a:t> 관리가 상대적으로 쉽다</a:t>
-            </a:r>
-            <a:r>
-              <a:rPr lang="en-US" altLang="ko-KR" sz="1600" spc="-50" dirty="0"/>
-              <a:t>.</a:t>
-            </a:r>
-          </a:p>
-        </p:txBody>
-      </p:sp>
-      <p:sp>
-        <p:nvSpPr>
-          <p:cNvPr id="2" name="제목 1">
-            <a:extLst>
-              <a:ext uri="{FF2B5EF4-FFF2-40B4-BE49-F238E27FC236}">
-                <a16:creationId xmlns:a16="http://schemas.microsoft.com/office/drawing/2014/main" id="{CC3627F6-B75C-160F-D323-A1CAD77F2BB2}"/>
-              </a:ext>
-            </a:extLst>
-          </p:cNvPr>
-          <p:cNvSpPr>
-            <a:spLocks noGrp="1"/>
-          </p:cNvSpPr>
-          <p:nvPr>
-            <p:ph type="title"/>
-          </p:nvPr>
-        </p:nvSpPr>
-        <p:spPr/>
-        <p:txBody>
-          <a:bodyPr/>
-          <a:lstStyle/>
-          <a:p>
-            <a:r>
-              <a:rPr lang="ko-KR" altLang="en-US" dirty="0"/>
-              <a:t>오염물질의 종류</a:t>
-            </a:r>
-          </a:p>
-        </p:txBody>
-      </p:sp>
-      <p:sp>
-        <p:nvSpPr>
-          <p:cNvPr id="4" name="슬라이드 번호 개체 틀 3">
-            <a:extLst>
-              <a:ext uri="{FF2B5EF4-FFF2-40B4-BE49-F238E27FC236}">
-                <a16:creationId xmlns:a16="http://schemas.microsoft.com/office/drawing/2014/main" id="{D00C19D3-8921-4E64-BDE9-97C785D39AEA}"/>
-              </a:ext>
-            </a:extLst>
-          </p:cNvPr>
-          <p:cNvSpPr>
-            <a:spLocks noGrp="1"/>
-          </p:cNvSpPr>
-          <p:nvPr>
-            <p:ph type="sldNum" sz="quarter" idx="12"/>
-          </p:nvPr>
-        </p:nvSpPr>
-        <p:spPr/>
-        <p:txBody>
-          <a:bodyPr/>
-          <a:lstStyle/>
-          <a:p>
-            <a:fld id="{109C872D-39A9-4065-8BF3-6A613116E2A1}" type="slidenum">
-              <a:rPr lang="ko-KR" altLang="en-US" smtClean="0"/>
-              <a:t>20</a:t>
-            </a:fld>
-            <a:endParaRPr lang="ko-KR" altLang="en-US"/>
-          </a:p>
-        </p:txBody>
-      </p:sp>
-    </p:spTree>
-    <p:extLst>
-      <p:ext uri="{BB962C8B-B14F-4D97-AF65-F5344CB8AC3E}">
-        <p14:creationId xmlns:p14="http://schemas.microsoft.com/office/powerpoint/2010/main" val="2180032017"/>
-      </p:ext>
-    </p:extLst>
-  </p:cSld>
-  <p:clrMapOvr>
-    <a:masterClrMapping/>
-  </p:clrMapOvr>
-</p:sld>
-</file>
-
-<file path=ppt/slides/slide21.xml><?xml version="1.0" encoding="utf-8"?>
-<p:sld xmlns:a="http://schemas.openxmlformats.org/drawingml/2006/main" xmlns:r="http://schemas.openxmlformats.org/officeDocument/2006/relationships" xmlns:p="http://schemas.openxmlformats.org/presentationml/2006/main">
-  <p:cSld>
-    <p:spTree>
-      <p:nvGrpSpPr>
-        <p:cNvPr id="1" name="">
-          <a:extLst>
-            <a:ext uri="{FF2B5EF4-FFF2-40B4-BE49-F238E27FC236}">
               <a16:creationId xmlns:a16="http://schemas.microsoft.com/office/drawing/2014/main" id="{780DC89C-35E3-9400-B571-5B8C8B91A99E}"/>
             </a:ext>
           </a:extLst>
@@ -12521,7 +12092,7 @@
           <a:p>
             <a:fld id="{109C872D-39A9-4065-8BF3-6A613116E2A1}" type="slidenum">
               <a:rPr lang="ko-KR" altLang="en-US" smtClean="0"/>
-              <a:t>21</a:t>
+              <a:t>20</a:t>
             </a:fld>
             <a:endParaRPr lang="ko-KR" altLang="en-US"/>
           </a:p>
@@ -12540,7 +12111,7 @@
 </p:sld>
 </file>
 
-<file path=ppt/slides/slide22.xml><?xml version="1.0" encoding="utf-8"?>
+<file path=ppt/slides/slide21.xml><?xml version="1.0" encoding="utf-8"?>
 <p:sld xmlns:a="http://schemas.openxmlformats.org/drawingml/2006/main" xmlns:r="http://schemas.openxmlformats.org/officeDocument/2006/relationships" xmlns:p="http://schemas.openxmlformats.org/presentationml/2006/main">
   <p:cSld>
     <p:spTree>
@@ -12668,7 +12239,7 @@
           <a:p>
             <a:fld id="{109C872D-39A9-4065-8BF3-6A613116E2A1}" type="slidenum">
               <a:rPr lang="ko-KR" altLang="en-US" smtClean="0"/>
-              <a:t>22</a:t>
+              <a:t>21</a:t>
             </a:fld>
             <a:endParaRPr lang="ko-KR" altLang="en-US"/>
           </a:p>
@@ -14746,7 +14317,7 @@
         <p:cNvPr id="1" name="">
           <a:extLst>
             <a:ext uri="{FF2B5EF4-FFF2-40B4-BE49-F238E27FC236}">
-              <a16:creationId xmlns:a16="http://schemas.microsoft.com/office/drawing/2014/main" id="{2EE3105A-7446-399D-F1FD-96A6319432CF}"/>
+              <a16:creationId xmlns:a16="http://schemas.microsoft.com/office/drawing/2014/main" id="{99B4BFDE-9DC0-BBE8-141A-E57D71DDA067}"/>
             </a:ext>
           </a:extLst>
         </p:cNvPr>
@@ -14766,7 +14337,7 @@
           <p:cNvPr id="2" name="제목 1">
             <a:extLst>
               <a:ext uri="{FF2B5EF4-FFF2-40B4-BE49-F238E27FC236}">
-                <a16:creationId xmlns:a16="http://schemas.microsoft.com/office/drawing/2014/main" id="{DA097C33-5B18-CF2E-E0F7-199448E5EECA}"/>
+                <a16:creationId xmlns:a16="http://schemas.microsoft.com/office/drawing/2014/main" id="{D63A5E96-0359-D726-9024-BEFE514AE268}"/>
               </a:ext>
             </a:extLst>
           </p:cNvPr>
@@ -14794,7 +14365,7 @@
           <p:cNvPr id="4" name="슬라이드 번호 개체 틀 3">
             <a:extLst>
               <a:ext uri="{FF2B5EF4-FFF2-40B4-BE49-F238E27FC236}">
-                <a16:creationId xmlns:a16="http://schemas.microsoft.com/office/drawing/2014/main" id="{54E572AA-EBCB-2961-BBE6-7E6F8B9CA314}"/>
+                <a16:creationId xmlns:a16="http://schemas.microsoft.com/office/drawing/2014/main" id="{5DC104D6-2F2F-5339-D56E-F422C911DCA2}"/>
               </a:ext>
             </a:extLst>
           </p:cNvPr>
@@ -14823,7 +14394,7 @@
           <p:cNvPr id="5" name="TextBox 4">
             <a:extLst>
               <a:ext uri="{FF2B5EF4-FFF2-40B4-BE49-F238E27FC236}">
-                <a16:creationId xmlns:a16="http://schemas.microsoft.com/office/drawing/2014/main" id="{F91C3B45-986C-E33E-C024-074C18581FF8}"/>
+                <a16:creationId xmlns:a16="http://schemas.microsoft.com/office/drawing/2014/main" id="{F24697DF-1709-FFC3-EFC4-B485F99139B6}"/>
               </a:ext>
             </a:extLst>
           </p:cNvPr>
@@ -14833,7 +14404,7 @@
         <p:spPr>
           <a:xfrm>
             <a:off x="288790" y="958844"/>
-            <a:ext cx="10707658" cy="2260683"/>
+            <a:ext cx="10707658" cy="5584670"/>
           </a:xfrm>
           <a:prstGeom prst="rect">
             <a:avLst/>
@@ -14854,28 +14425,55 @@
               <a:buChar char="•"/>
             </a:pPr>
             <a:r>
+              <a:rPr lang="ko-KR" altLang="en-US" sz="1600" spc="-50" dirty="0"/>
+              <a:t>물질균형접근법은 자연과학의 연구 성과를 근거하여</a:t>
+            </a:r>
+            <a:r>
+              <a:rPr lang="en-US" altLang="ko-KR" sz="1600" spc="-50" dirty="0"/>
+              <a:t>, </a:t>
+            </a:r>
+            <a:r>
+              <a:rPr lang="ko-KR" altLang="en-US" sz="1600" spc="-50" dirty="0"/>
+              <a:t>자연으로부터 경제로의 천연자원의 흐름과 경제로부터 자연으로의 폐기물의 흐름은 일종의 균형을 이룬다고 설명한다</a:t>
+            </a:r>
+            <a:r>
+              <a:rPr lang="en-US" altLang="ko-KR" sz="1600" spc="-50" dirty="0"/>
+              <a:t>.</a:t>
+            </a:r>
+          </a:p>
+          <a:p>
+            <a:pPr marL="377825" indent="-285750">
+              <a:lnSpc>
+                <a:spcPct val="150000"/>
+              </a:lnSpc>
+              <a:buFont typeface="Arial" panose="020B0604020202020204" pitchFamily="34" charset="0"/>
+              <a:buChar char="•"/>
+            </a:pPr>
+            <a:endParaRPr lang="en-US" altLang="ko-KR" sz="1600" spc="-50" dirty="0"/>
+          </a:p>
+          <a:p>
+            <a:pPr marL="377825" indent="-285750">
+              <a:lnSpc>
+                <a:spcPct val="150000"/>
+              </a:lnSpc>
+              <a:buFont typeface="Arial" panose="020B0604020202020204" pitchFamily="34" charset="0"/>
+              <a:buChar char="•"/>
+            </a:pPr>
+            <a:r>
               <a:rPr lang="en-US" altLang="ko-KR" sz="1600" spc="-50" dirty="0"/>
               <a:t>(</a:t>
             </a:r>
             <a:r>
               <a:rPr lang="ko-KR" altLang="en-US" sz="1600" spc="-50" dirty="0"/>
-              <a:t>두번째 경로</a:t>
-            </a:r>
-            <a:r>
-              <a:rPr lang="en-US" altLang="ko-KR" sz="1600" spc="-50" dirty="0"/>
-              <a:t>: </a:t>
-            </a:r>
-            <a:r>
-              <a:rPr lang="ko-KR" altLang="en-US" sz="1600" spc="-50" dirty="0"/>
-              <a:t>경제 </a:t>
-            </a:r>
-            <a:r>
-              <a:rPr lang="en-US" altLang="ko-KR" sz="1600" spc="-50" dirty="0"/>
-              <a:t>&gt; </a:t>
-            </a:r>
-            <a:r>
-              <a:rPr lang="ko-KR" altLang="en-US" sz="1600" spc="-50" dirty="0"/>
-              <a:t>자연</a:t>
+              <a:t>열역학 제</a:t>
+            </a:r>
+            <a:r>
+              <a:rPr lang="en-US" altLang="ko-KR" sz="1600" spc="-50" dirty="0"/>
+              <a:t>1</a:t>
+            </a:r>
+            <a:r>
+              <a:rPr lang="ko-KR" altLang="en-US" sz="1600" spc="-50" dirty="0"/>
+              <a:t>법칙</a:t>
             </a:r>
             <a:r>
               <a:rPr lang="en-US" altLang="ko-KR" sz="1600" spc="-50" dirty="0"/>
@@ -14883,7 +14481,7 @@
             </a:r>
             <a:r>
               <a:rPr lang="ko-KR" altLang="en-US" sz="1600" spc="-50" dirty="0"/>
-              <a:t> 이 흐름은 경제행위 결과로 발생하여 자연으로 배출되는 부산물 혹은 폐기물의 흐름이며</a:t>
+              <a:t>에너지는 형태를 바꿀 수 있지만</a:t>
             </a:r>
             <a:r>
               <a:rPr lang="en-US" altLang="ko-KR" sz="1600" spc="-50" dirty="0"/>
@@ -14891,7 +14489,7 @@
             </a:r>
             <a:r>
               <a:rPr lang="ko-KR" altLang="en-US" sz="1600" spc="-50" dirty="0"/>
-              <a:t>자연이나 환경에 방출되는 오염물질의 흐름을 의미한다</a:t>
+              <a:t>총량은 변하지 않는다</a:t>
             </a:r>
             <a:r>
               <a:rPr lang="en-US" altLang="ko-KR" sz="1600" spc="-50" dirty="0"/>
@@ -14908,44 +14506,53 @@
             </a:pPr>
             <a:r>
               <a:rPr lang="ko-KR" altLang="en-US" sz="1600" spc="-50" dirty="0"/>
-              <a:t>오염물질로는 화석연료 연소로 발생하는 이산화탄소</a:t>
-            </a:r>
-            <a:r>
-              <a:rPr lang="en-US" altLang="ko-KR" sz="1600" spc="-50" dirty="0"/>
-              <a:t>, </a:t>
-            </a:r>
-            <a:r>
-              <a:rPr lang="ko-KR" altLang="en-US" sz="1600" spc="-50" dirty="0"/>
-              <a:t>생활 및 공장하수 등을 예로 들 수 있다</a:t>
-            </a:r>
-            <a:r>
-              <a:rPr lang="en-US" altLang="ko-KR" sz="1600" spc="-50" dirty="0"/>
-              <a:t>.</a:t>
-            </a:r>
-          </a:p>
-          <a:p>
-            <a:pPr marL="1292225" lvl="2" indent="-285750">
+              <a:t>자연으로부터 추출된 물질이나 에너지는 재활용이나 재사용을 통해 잠시 지체될 수 있지만</a:t>
+            </a:r>
+            <a:r>
+              <a:rPr lang="en-US" altLang="ko-KR" sz="1600" spc="-50" dirty="0"/>
+              <a:t> </a:t>
+            </a:r>
+            <a:r>
+              <a:rPr lang="ko-KR" altLang="en-US" sz="1600" spc="-50" dirty="0"/>
+              <a:t>궁극적으로는 동일한 양의 폐기물로 전환되어 자연으로 환원</a:t>
+            </a:r>
+            <a:endParaRPr lang="en-US" altLang="ko-KR" sz="1600" spc="-50" dirty="0"/>
+          </a:p>
+          <a:p>
+            <a:pPr marL="377825" indent="-285750">
               <a:lnSpc>
                 <a:spcPct val="150000"/>
               </a:lnSpc>
-              <a:buFont typeface="Wingdings" panose="05000000000000000000" pitchFamily="2" charset="2"/>
-              <a:buChar char="Ø"/>
+              <a:buFont typeface="Arial" panose="020B0604020202020204" pitchFamily="34" charset="0"/>
+              <a:buChar char="•"/>
             </a:pPr>
             <a:r>
-              <a:rPr lang="ko-KR" altLang="en-US" sz="1600" spc="-50" dirty="0"/>
-              <a:t>자연에 의해 흡수 및 정화되기도 하지만</a:t>
-            </a:r>
-            <a:r>
-              <a:rPr lang="en-US" altLang="ko-KR" sz="1600" spc="-50" dirty="0"/>
-              <a:t>, </a:t>
-            </a:r>
-            <a:r>
-              <a:rPr lang="ko-KR" altLang="en-US" sz="1600" spc="-50" dirty="0"/>
-              <a:t>상당부분이 오염물질의 형태로 자연에 잔류하게 된다</a:t>
-            </a:r>
-            <a:r>
-              <a:rPr lang="en-US" altLang="ko-KR" sz="1600" spc="-50" dirty="0"/>
-              <a:t>.</a:t>
+              <a:rPr lang="en-US" altLang="ko-KR" sz="1600" spc="-50" dirty="0"/>
+              <a:t>(</a:t>
+            </a:r>
+            <a:r>
+              <a:rPr lang="ko-KR" altLang="en-US" sz="1600" spc="-50" dirty="0"/>
+              <a:t>열역학 제</a:t>
+            </a:r>
+            <a:r>
+              <a:rPr lang="en-US" altLang="ko-KR" sz="1600" spc="-50" dirty="0"/>
+              <a:t>2</a:t>
+            </a:r>
+            <a:r>
+              <a:rPr lang="ko-KR" altLang="en-US" sz="1600" spc="-50" dirty="0"/>
+              <a:t>법칙</a:t>
+            </a:r>
+            <a:r>
+              <a:rPr lang="en-US" altLang="ko-KR" sz="1600" spc="-50" dirty="0"/>
+              <a:t>) </a:t>
+            </a:r>
+            <a:r>
+              <a:rPr lang="ko-KR" altLang="en-US" sz="1600" spc="-50" dirty="0"/>
+              <a:t>엔트로피는 항상 증가하거나 유지 된다</a:t>
+            </a:r>
+            <a:r>
+              <a:rPr lang="en-US" altLang="ko-KR" sz="1600" spc="-50" dirty="0"/>
+              <a:t>. </a:t>
             </a:r>
           </a:p>
           <a:p>
@@ -14958,7 +14565,31 @@
             </a:pPr>
             <a:r>
               <a:rPr lang="ko-KR" altLang="en-US" sz="1600" spc="-50" dirty="0"/>
-              <a:t>오염물질은 생산행위 및 소비행위 모두로부터 발생하며</a:t>
+              <a:t>예</a:t>
+            </a:r>
+            <a:r>
+              <a:rPr lang="en-US" altLang="ko-KR" sz="1600" spc="-50" dirty="0"/>
+              <a:t>: </a:t>
+            </a:r>
+            <a:r>
+              <a:rPr lang="ko-KR" altLang="en-US" sz="1600" spc="-50" dirty="0"/>
+              <a:t>열은 </a:t>
+            </a:r>
+            <a:r>
+              <a:rPr lang="ko-KR" altLang="en-US" sz="1600" spc="-50" dirty="0" err="1"/>
+              <a:t>고온에서</a:t>
+            </a:r>
+            <a:r>
+              <a:rPr lang="ko-KR" altLang="en-US" sz="1600" spc="-50" dirty="0"/>
+              <a:t> 저온으로 흐름</a:t>
+            </a:r>
+            <a:r>
+              <a:rPr lang="en-US" altLang="ko-KR" sz="1600" spc="-50" dirty="0"/>
+              <a:t>. </a:t>
+            </a:r>
+            <a:r>
+              <a:rPr lang="ko-KR" altLang="en-US" sz="1600" spc="-50" dirty="0"/>
+              <a:t>뜨거운 커피는 저절로 식지만</a:t>
             </a:r>
             <a:r>
               <a:rPr lang="en-US" altLang="ko-KR" sz="1600" spc="-50" dirty="0"/>
@@ -14966,7 +14597,126 @@
             </a:r>
             <a:r>
               <a:rPr lang="ko-KR" altLang="en-US" sz="1600" spc="-50" dirty="0"/>
-              <a:t>경제로부터 자연으로의 오염물질 흐름을 연구하는 분야가 환경경제학이다</a:t>
+              <a:t>찬 커피는 저절로 뜨거워지지 않는다</a:t>
+            </a:r>
+            <a:r>
+              <a:rPr lang="en-US" altLang="ko-KR" sz="1600" spc="-50" dirty="0"/>
+              <a:t>.</a:t>
+            </a:r>
+          </a:p>
+          <a:p>
+            <a:pPr marL="835025" lvl="1" indent="-285750">
+              <a:lnSpc>
+                <a:spcPct val="150000"/>
+              </a:lnSpc>
+              <a:buFont typeface="Wingdings" panose="05000000000000000000" pitchFamily="2" charset="2"/>
+              <a:buChar char="ü"/>
+            </a:pPr>
+            <a:r>
+              <a:rPr lang="ko-KR" altLang="en-US" sz="1600" spc="-50" dirty="0"/>
+              <a:t>물질이나 에너지의 형태가 전환되는 과정이 거듭될수록 사용할 수 없는 에너지의 양은 점차 증가한다</a:t>
+            </a:r>
+            <a:r>
+              <a:rPr lang="en-US" altLang="ko-KR" sz="1600" spc="-50" dirty="0"/>
+              <a:t>.</a:t>
+            </a:r>
+          </a:p>
+          <a:p>
+            <a:pPr marL="835025" lvl="1" indent="-285750">
+              <a:lnSpc>
+                <a:spcPct val="150000"/>
+              </a:lnSpc>
+              <a:buFont typeface="Wingdings" panose="05000000000000000000" pitchFamily="2" charset="2"/>
+              <a:buChar char="ü"/>
+            </a:pPr>
+            <a:r>
+              <a:rPr lang="ko-KR" altLang="en-US" sz="1600" spc="-50" dirty="0"/>
+              <a:t>따라서 자연과 폐기물 간의 순환관계가 반복되면 결국은 천연자원이 모두 고갈되고</a:t>
+            </a:r>
+            <a:r>
+              <a:rPr lang="en-US" altLang="ko-KR" sz="1600" spc="-50" dirty="0"/>
+              <a:t>, </a:t>
+            </a:r>
+            <a:r>
+              <a:rPr lang="ko-KR" altLang="en-US" sz="1600" spc="-50" dirty="0"/>
+              <a:t>인류의 생존 자체도 불가능하게 된다</a:t>
+            </a:r>
+            <a:r>
+              <a:rPr lang="en-US" altLang="ko-KR" sz="1600" spc="-50" dirty="0"/>
+              <a:t>.</a:t>
+            </a:r>
+          </a:p>
+          <a:p>
+            <a:pPr marL="377825" indent="-285750">
+              <a:lnSpc>
+                <a:spcPct val="150000"/>
+              </a:lnSpc>
+              <a:buFont typeface="Arial" panose="020B0604020202020204" pitchFamily="34" charset="0"/>
+              <a:buChar char="•"/>
+            </a:pPr>
+            <a:endParaRPr lang="en-US" altLang="ko-KR" sz="1600" spc="-50" dirty="0"/>
+          </a:p>
+          <a:p>
+            <a:pPr marL="377825" indent="-285750">
+              <a:lnSpc>
+                <a:spcPct val="150000"/>
+              </a:lnSpc>
+              <a:buFont typeface="Arial" panose="020B0604020202020204" pitchFamily="34" charset="0"/>
+              <a:buChar char="•"/>
+            </a:pPr>
+            <a:r>
+              <a:rPr lang="ko-KR" altLang="en-US" sz="1600" spc="-50" dirty="0"/>
+              <a:t>물질균형접근법은 크게 두 가지 함의를 주고 있다</a:t>
+            </a:r>
+            <a:r>
+              <a:rPr lang="en-US" altLang="ko-KR" sz="1600" spc="-50" dirty="0"/>
+              <a:t>.</a:t>
+            </a:r>
+          </a:p>
+          <a:p>
+            <a:pPr marL="835025" lvl="1" indent="-285750">
+              <a:lnSpc>
+                <a:spcPct val="150000"/>
+              </a:lnSpc>
+              <a:buFont typeface="Wingdings" panose="05000000000000000000" pitchFamily="2" charset="2"/>
+              <a:buChar char="ü"/>
+            </a:pPr>
+            <a:r>
+              <a:rPr lang="ko-KR" altLang="en-US" sz="1600" spc="-50" dirty="0"/>
+              <a:t>첫째</a:t>
+            </a:r>
+            <a:r>
+              <a:rPr lang="en-US" altLang="ko-KR" sz="1600" spc="-50" dirty="0"/>
+              <a:t>, </a:t>
+            </a:r>
+            <a:r>
+              <a:rPr lang="ko-KR" altLang="en-US" sz="1600" spc="-50" dirty="0"/>
+              <a:t>모든 천연자원을 이용하는 경제행위는 환경오염을 유발할 폐기물을 반드시 유출한다</a:t>
+            </a:r>
+            <a:r>
+              <a:rPr lang="en-US" altLang="ko-KR" sz="1600" spc="-50" dirty="0"/>
+              <a:t>.</a:t>
+            </a:r>
+          </a:p>
+          <a:p>
+            <a:pPr marL="835025" lvl="1" indent="-285750">
+              <a:lnSpc>
+                <a:spcPct val="150000"/>
+              </a:lnSpc>
+              <a:buFont typeface="Wingdings" panose="05000000000000000000" pitchFamily="2" charset="2"/>
+              <a:buChar char="ü"/>
+            </a:pPr>
+            <a:r>
+              <a:rPr lang="ko-KR" altLang="en-US" sz="1600" spc="-50" dirty="0"/>
+              <a:t>둘째</a:t>
+            </a:r>
+            <a:r>
+              <a:rPr lang="en-US" altLang="ko-KR" sz="1600" spc="-50" dirty="0"/>
+              <a:t>, </a:t>
+            </a:r>
+            <a:r>
+              <a:rPr lang="ko-KR" altLang="en-US" sz="1600" spc="-50" dirty="0"/>
+              <a:t>천연자원을 다른 형태의 물질이나 에너지로 전환할 수 있는 능력은 제한되어 있다</a:t>
             </a:r>
             <a:r>
               <a:rPr lang="en-US" altLang="ko-KR" sz="1600" spc="-50" dirty="0"/>
@@ -14978,7 +14728,7 @@
     </p:spTree>
     <p:extLst>
       <p:ext uri="{BB962C8B-B14F-4D97-AF65-F5344CB8AC3E}">
-        <p14:creationId xmlns:p14="http://schemas.microsoft.com/office/powerpoint/2010/main" val="1441377731"/>
+        <p14:creationId xmlns:p14="http://schemas.microsoft.com/office/powerpoint/2010/main" val="1447001655"/>
       </p:ext>
     </p:extLst>
   </p:cSld>
